--- a/templates/google-slides/nozilla-slides-master.pptx
+++ b/templates/google-slides/nozilla-slides-master.pptx
@@ -3121,7 +3121,7 @@
             <a:avLst/>
           </a:prstGeom>
           <a:solidFill>
-            <a:srgbClr val="FFFEE5"/>
+            <a:srgbClr val="FFFFFF"/>
           </a:solidFill>
           <a:ln>
             <a:noFill/>
@@ -3486,7 +3486,7 @@
         <p:spPr>
           <a:xfrm>
             <a:off x="777240" y="5349240"/>
-            <a:ext cx="1828800" cy="585216"/>
+            <a:ext cx="2286000" cy="621792"/>
           </a:xfrm>
           <a:prstGeom prst="rect">
             <a:avLst/>
@@ -3507,6 +3507,15 @@
                 <a:latin typeface="Zilla Slab"/>
               </a:rPr>
               <a:t>nozilla</a:t>
+            </a:r>
+            <a:r>
+              <a:rPr b="1" sz="6800">
+                <a:solidFill>
+                  <a:srgbClr val="00FF9C"/>
+                </a:solidFill>
+                <a:latin typeface="Zilla Slab"/>
+              </a:rPr>
+              <a:t>.</a:t>
             </a:r>
           </a:p>
         </p:txBody>
@@ -3599,7 +3608,7 @@
             <a:avLst/>
           </a:prstGeom>
           <a:solidFill>
-            <a:srgbClr val="FFFEE5"/>
+            <a:srgbClr val="FFFFFF"/>
           </a:solidFill>
           <a:ln>
             <a:noFill/>
@@ -3940,33 +3949,37 @@
         </p:nvSpPr>
         <p:spPr>
           <a:xfrm>
-            <a:off x="777240" y="6327648"/>
-            <a:ext cx="2743200" cy="274320"/>
-          </a:xfrm>
-          <a:prstGeom prst="rect">
-            <a:avLst/>
-          </a:prstGeom>
-          <a:noFill/>
-        </p:spPr>
-        <p:txBody>
-          <a:bodyPr wrap="square" lIns="0" rIns="0" tIns="0" bIns="0" anchor="t">
-            <a:spAutoFit/>
-          </a:bodyPr>
-          <a:lstStyle/>
-          <a:p>
-            <a:pPr algn="l">
-              <a:lnSpc>
-                <a:spcPct val="100000"/>
-              </a:lnSpc>
-            </a:pPr>
-            <a:r>
-              <a:rPr sz="1200" b="1">
+            <a:off x="777240" y="6309360"/>
+            <a:ext cx="480060" cy="130576"/>
+          </a:xfrm>
+          <a:prstGeom prst="rect">
+            <a:avLst/>
+          </a:prstGeom>
+          <a:noFill/>
+        </p:spPr>
+        <p:txBody>
+          <a:bodyPr wrap="none" lIns="0" rIns="0" tIns="0" bIns="0">
+            <a:spAutoFit/>
+          </a:bodyPr>
+          <a:lstStyle/>
+          <a:p>
+            <a:r>
+              <a:rPr b="1" sz="1428">
                 <a:solidFill>
                   <a:srgbClr val="555555"/>
                 </a:solidFill>
                 <a:latin typeface="Zilla Slab"/>
               </a:rPr>
               <a:t>nozilla</a:t>
+            </a:r>
+            <a:r>
+              <a:rPr b="1" sz="1428">
+                <a:solidFill>
+                  <a:srgbClr val="00FF9C"/>
+                </a:solidFill>
+                <a:latin typeface="Zilla Slab"/>
+              </a:rPr>
+              <a:t>.</a:t>
             </a:r>
           </a:p>
         </p:txBody>
@@ -4043,7 +4056,7 @@
             <a:avLst/>
           </a:prstGeom>
           <a:solidFill>
-            <a:srgbClr val="FFFEE5"/>
+            <a:srgbClr val="FFFFFF"/>
           </a:solidFill>
           <a:ln>
             <a:noFill/>
@@ -4292,7 +4305,7 @@
             <a:avLst/>
           </a:prstGeom>
           <a:solidFill>
-            <a:srgbClr val="FFFEE5"/>
+            <a:srgbClr val="FFFFFF"/>
           </a:solidFill>
           <a:ln w="25400">
             <a:solidFill>
@@ -4499,7 +4512,7 @@
             <a:avLst/>
           </a:prstGeom>
           <a:solidFill>
-            <a:srgbClr val="FFFEE5"/>
+            <a:srgbClr val="FFFFFF"/>
           </a:solidFill>
           <a:ln w="25400">
             <a:solidFill>
@@ -4706,7 +4719,7 @@
             <a:avLst/>
           </a:prstGeom>
           <a:solidFill>
-            <a:srgbClr val="FFFEE5"/>
+            <a:srgbClr val="FFFFFF"/>
           </a:solidFill>
           <a:ln w="25400">
             <a:solidFill>
@@ -4906,33 +4919,37 @@
         </p:nvSpPr>
         <p:spPr>
           <a:xfrm>
-            <a:off x="777240" y="6327648"/>
-            <a:ext cx="2743200" cy="274320"/>
-          </a:xfrm>
-          <a:prstGeom prst="rect">
-            <a:avLst/>
-          </a:prstGeom>
-          <a:noFill/>
-        </p:spPr>
-        <p:txBody>
-          <a:bodyPr wrap="square" lIns="0" rIns="0" tIns="0" bIns="0" anchor="t">
-            <a:spAutoFit/>
-          </a:bodyPr>
-          <a:lstStyle/>
-          <a:p>
-            <a:pPr algn="l">
-              <a:lnSpc>
-                <a:spcPct val="100000"/>
-              </a:lnSpc>
-            </a:pPr>
-            <a:r>
-              <a:rPr sz="1200" b="1">
+            <a:off x="777240" y="6309360"/>
+            <a:ext cx="480060" cy="130576"/>
+          </a:xfrm>
+          <a:prstGeom prst="rect">
+            <a:avLst/>
+          </a:prstGeom>
+          <a:noFill/>
+        </p:spPr>
+        <p:txBody>
+          <a:bodyPr wrap="none" lIns="0" rIns="0" tIns="0" bIns="0">
+            <a:spAutoFit/>
+          </a:bodyPr>
+          <a:lstStyle/>
+          <a:p>
+            <a:r>
+              <a:rPr b="1" sz="1428">
                 <a:solidFill>
                   <a:srgbClr val="555555"/>
                 </a:solidFill>
                 <a:latin typeface="Zilla Slab"/>
               </a:rPr>
               <a:t>nozilla</a:t>
+            </a:r>
+            <a:r>
+              <a:rPr b="1" sz="1428">
+                <a:solidFill>
+                  <a:srgbClr val="00FF9C"/>
+                </a:solidFill>
+                <a:latin typeface="Zilla Slab"/>
+              </a:rPr>
+              <a:t>.</a:t>
             </a:r>
           </a:p>
         </p:txBody>
@@ -5009,7 +5026,7 @@
             <a:avLst/>
           </a:prstGeom>
           <a:solidFill>
-            <a:srgbClr val="FFFEE5"/>
+            <a:srgbClr val="FFFFFF"/>
           </a:solidFill>
           <a:ln>
             <a:noFill/>
@@ -5672,7 +5689,7 @@
             <a:avLst/>
           </a:prstGeom>
           <a:solidFill>
-            <a:srgbClr val="FFFEE5"/>
+            <a:srgbClr val="FFFFFF"/>
           </a:solidFill>
           <a:ln w="25400">
             <a:solidFill>
@@ -5835,7 +5852,7 @@
             <a:avLst/>
           </a:prstGeom>
           <a:solidFill>
-            <a:srgbClr val="FFFEE5"/>
+            <a:srgbClr val="FFFFFF"/>
           </a:solidFill>
           <a:ln w="25400">
             <a:solidFill>
@@ -6035,33 +6052,37 @@
         </p:nvSpPr>
         <p:spPr>
           <a:xfrm>
-            <a:off x="777240" y="6327648"/>
-            <a:ext cx="2743200" cy="274320"/>
-          </a:xfrm>
-          <a:prstGeom prst="rect">
-            <a:avLst/>
-          </a:prstGeom>
-          <a:noFill/>
-        </p:spPr>
-        <p:txBody>
-          <a:bodyPr wrap="square" lIns="0" rIns="0" tIns="0" bIns="0" anchor="t">
-            <a:spAutoFit/>
-          </a:bodyPr>
-          <a:lstStyle/>
-          <a:p>
-            <a:pPr algn="l">
-              <a:lnSpc>
-                <a:spcPct val="100000"/>
-              </a:lnSpc>
-            </a:pPr>
-            <a:r>
-              <a:rPr sz="1200" b="1">
+            <a:off x="777240" y="6309360"/>
+            <a:ext cx="480060" cy="130576"/>
+          </a:xfrm>
+          <a:prstGeom prst="rect">
+            <a:avLst/>
+          </a:prstGeom>
+          <a:noFill/>
+        </p:spPr>
+        <p:txBody>
+          <a:bodyPr wrap="none" lIns="0" rIns="0" tIns="0" bIns="0">
+            <a:spAutoFit/>
+          </a:bodyPr>
+          <a:lstStyle/>
+          <a:p>
+            <a:r>
+              <a:rPr b="1" sz="1428">
                 <a:solidFill>
                   <a:srgbClr val="555555"/>
                 </a:solidFill>
                 <a:latin typeface="Zilla Slab"/>
               </a:rPr>
               <a:t>nozilla</a:t>
+            </a:r>
+            <a:r>
+              <a:rPr b="1" sz="1428">
+                <a:solidFill>
+                  <a:srgbClr val="00FF9C"/>
+                </a:solidFill>
+                <a:latin typeface="Zilla Slab"/>
+              </a:rPr>
+              <a:t>.</a:t>
             </a:r>
           </a:p>
         </p:txBody>
@@ -6138,7 +6159,7 @@
             <a:avLst/>
           </a:prstGeom>
           <a:solidFill>
-            <a:srgbClr val="FFFEE5"/>
+            <a:srgbClr val="FFFFFF"/>
           </a:solidFill>
           <a:ln>
             <a:noFill/>
@@ -7380,33 +7401,37 @@
         </p:nvSpPr>
         <p:spPr>
           <a:xfrm>
-            <a:off x="777240" y="6327648"/>
-            <a:ext cx="2743200" cy="274320"/>
-          </a:xfrm>
-          <a:prstGeom prst="rect">
-            <a:avLst/>
-          </a:prstGeom>
-          <a:noFill/>
-        </p:spPr>
-        <p:txBody>
-          <a:bodyPr wrap="square" lIns="0" rIns="0" tIns="0" bIns="0" anchor="t">
-            <a:spAutoFit/>
-          </a:bodyPr>
-          <a:lstStyle/>
-          <a:p>
-            <a:pPr algn="l">
-              <a:lnSpc>
-                <a:spcPct val="100000"/>
-              </a:lnSpc>
-            </a:pPr>
-            <a:r>
-              <a:rPr sz="1200" b="1">
+            <a:off x="777240" y="6309360"/>
+            <a:ext cx="480060" cy="130576"/>
+          </a:xfrm>
+          <a:prstGeom prst="rect">
+            <a:avLst/>
+          </a:prstGeom>
+          <a:noFill/>
+        </p:spPr>
+        <p:txBody>
+          <a:bodyPr wrap="none" lIns="0" rIns="0" tIns="0" bIns="0">
+            <a:spAutoFit/>
+          </a:bodyPr>
+          <a:lstStyle/>
+          <a:p>
+            <a:r>
+              <a:rPr b="1" sz="1428">
                 <a:solidFill>
                   <a:srgbClr val="555555"/>
                 </a:solidFill>
                 <a:latin typeface="Zilla Slab"/>
               </a:rPr>
               <a:t>nozilla</a:t>
+            </a:r>
+            <a:r>
+              <a:rPr b="1" sz="1428">
+                <a:solidFill>
+                  <a:srgbClr val="00FF9C"/>
+                </a:solidFill>
+                <a:latin typeface="Zilla Slab"/>
+              </a:rPr>
+              <a:t>.</a:t>
             </a:r>
           </a:p>
         </p:txBody>
@@ -7483,7 +7508,7 @@
             <a:avLst/>
           </a:prstGeom>
           <a:solidFill>
-            <a:srgbClr val="FFFEE5"/>
+            <a:srgbClr val="FFFFFF"/>
           </a:solidFill>
           <a:ln>
             <a:noFill/>
@@ -7693,7 +7718,7 @@
             <a:avLst/>
           </a:prstGeom>
           <a:solidFill>
-            <a:srgbClr val="F4F1C4"/>
+            <a:srgbClr val="F2F2F0"/>
           </a:solidFill>
           <a:ln w="25400">
             <a:solidFill>
@@ -7909,33 +7934,37 @@
         </p:nvSpPr>
         <p:spPr>
           <a:xfrm>
-            <a:off x="777240" y="6327648"/>
-            <a:ext cx="2743200" cy="274320"/>
-          </a:xfrm>
-          <a:prstGeom prst="rect">
-            <a:avLst/>
-          </a:prstGeom>
-          <a:noFill/>
-        </p:spPr>
-        <p:txBody>
-          <a:bodyPr wrap="square" lIns="0" rIns="0" tIns="0" bIns="0" anchor="t">
-            <a:spAutoFit/>
-          </a:bodyPr>
-          <a:lstStyle/>
-          <a:p>
-            <a:pPr algn="l">
-              <a:lnSpc>
-                <a:spcPct val="100000"/>
-              </a:lnSpc>
-            </a:pPr>
-            <a:r>
-              <a:rPr sz="1200" b="1">
+            <a:off x="777240" y="6309360"/>
+            <a:ext cx="480060" cy="130576"/>
+          </a:xfrm>
+          <a:prstGeom prst="rect">
+            <a:avLst/>
+          </a:prstGeom>
+          <a:noFill/>
+        </p:spPr>
+        <p:txBody>
+          <a:bodyPr wrap="none" lIns="0" rIns="0" tIns="0" bIns="0">
+            <a:spAutoFit/>
+          </a:bodyPr>
+          <a:lstStyle/>
+          <a:p>
+            <a:r>
+              <a:rPr b="1" sz="1428">
                 <a:solidFill>
                   <a:srgbClr val="555555"/>
                 </a:solidFill>
                 <a:latin typeface="Zilla Slab"/>
               </a:rPr>
               <a:t>nozilla</a:t>
+            </a:r>
+            <a:r>
+              <a:rPr b="1" sz="1428">
+                <a:solidFill>
+                  <a:srgbClr val="00FF9C"/>
+                </a:solidFill>
+                <a:latin typeface="Zilla Slab"/>
+              </a:rPr>
+              <a:t>.</a:t>
             </a:r>
           </a:p>
         </p:txBody>
@@ -8012,7 +8041,7 @@
             <a:avLst/>
           </a:prstGeom>
           <a:solidFill>
-            <a:srgbClr val="FFFEE5"/>
+            <a:srgbClr val="FFFFFF"/>
           </a:solidFill>
           <a:ln>
             <a:noFill/>
@@ -9755,33 +9784,37 @@
         </p:nvSpPr>
         <p:spPr>
           <a:xfrm>
-            <a:off x="777240" y="6327648"/>
-            <a:ext cx="2743200" cy="274320"/>
-          </a:xfrm>
-          <a:prstGeom prst="rect">
-            <a:avLst/>
-          </a:prstGeom>
-          <a:noFill/>
-        </p:spPr>
-        <p:txBody>
-          <a:bodyPr wrap="square" lIns="0" rIns="0" tIns="0" bIns="0" anchor="t">
-            <a:spAutoFit/>
-          </a:bodyPr>
-          <a:lstStyle/>
-          <a:p>
-            <a:pPr algn="l">
-              <a:lnSpc>
-                <a:spcPct val="100000"/>
-              </a:lnSpc>
-            </a:pPr>
-            <a:r>
-              <a:rPr sz="1200" b="1">
+            <a:off x="777240" y="6309360"/>
+            <a:ext cx="480060" cy="130576"/>
+          </a:xfrm>
+          <a:prstGeom prst="rect">
+            <a:avLst/>
+          </a:prstGeom>
+          <a:noFill/>
+        </p:spPr>
+        <p:txBody>
+          <a:bodyPr wrap="none" lIns="0" rIns="0" tIns="0" bIns="0">
+            <a:spAutoFit/>
+          </a:bodyPr>
+          <a:lstStyle/>
+          <a:p>
+            <a:r>
+              <a:rPr b="1" sz="1428">
                 <a:solidFill>
                   <a:srgbClr val="555555"/>
                 </a:solidFill>
                 <a:latin typeface="Zilla Slab"/>
               </a:rPr>
               <a:t>nozilla</a:t>
+            </a:r>
+            <a:r>
+              <a:rPr b="1" sz="1428">
+                <a:solidFill>
+                  <a:srgbClr val="00FF9C"/>
+                </a:solidFill>
+                <a:latin typeface="Zilla Slab"/>
+              </a:rPr>
+              <a:t>.</a:t>
             </a:r>
           </a:p>
         </p:txBody>
@@ -9858,7 +9891,7 @@
             <a:avLst/>
           </a:prstGeom>
           <a:solidFill>
-            <a:srgbClr val="FFFEE5"/>
+            <a:srgbClr val="FFFFFF"/>
           </a:solidFill>
           <a:ln>
             <a:noFill/>
@@ -10107,7 +10140,7 @@
             <a:avLst/>
           </a:prstGeom>
           <a:solidFill>
-            <a:srgbClr val="F4F1C4"/>
+            <a:srgbClr val="F2F2F0"/>
           </a:solidFill>
           <a:ln w="25400">
             <a:solidFill>
@@ -10386,7 +10419,7 @@
             <a:avLst/>
           </a:prstGeom>
           <a:solidFill>
-            <a:srgbClr val="F4F1C4"/>
+            <a:srgbClr val="F2F2F0"/>
           </a:solidFill>
           <a:ln w="25400">
             <a:solidFill>
@@ -10665,7 +10698,7 @@
             <a:avLst/>
           </a:prstGeom>
           <a:solidFill>
-            <a:srgbClr val="F4F1C4"/>
+            <a:srgbClr val="F2F2F0"/>
           </a:solidFill>
           <a:ln w="25400">
             <a:solidFill>
@@ -10944,7 +10977,7 @@
             <a:avLst/>
           </a:prstGeom>
           <a:solidFill>
-            <a:srgbClr val="F4F1C4"/>
+            <a:srgbClr val="F2F2F0"/>
           </a:solidFill>
           <a:ln w="25400">
             <a:solidFill>
@@ -11216,33 +11249,37 @@
         </p:nvSpPr>
         <p:spPr>
           <a:xfrm>
-            <a:off x="777240" y="6327648"/>
-            <a:ext cx="2743200" cy="274320"/>
-          </a:xfrm>
-          <a:prstGeom prst="rect">
-            <a:avLst/>
-          </a:prstGeom>
-          <a:noFill/>
-        </p:spPr>
-        <p:txBody>
-          <a:bodyPr wrap="square" lIns="0" rIns="0" tIns="0" bIns="0" anchor="t">
-            <a:spAutoFit/>
-          </a:bodyPr>
-          <a:lstStyle/>
-          <a:p>
-            <a:pPr algn="l">
-              <a:lnSpc>
-                <a:spcPct val="100000"/>
-              </a:lnSpc>
-            </a:pPr>
-            <a:r>
-              <a:rPr sz="1200" b="1">
+            <a:off x="777240" y="6309360"/>
+            <a:ext cx="480060" cy="130576"/>
+          </a:xfrm>
+          <a:prstGeom prst="rect">
+            <a:avLst/>
+          </a:prstGeom>
+          <a:noFill/>
+        </p:spPr>
+        <p:txBody>
+          <a:bodyPr wrap="none" lIns="0" rIns="0" tIns="0" bIns="0">
+            <a:spAutoFit/>
+          </a:bodyPr>
+          <a:lstStyle/>
+          <a:p>
+            <a:r>
+              <a:rPr b="1" sz="1428">
                 <a:solidFill>
                   <a:srgbClr val="555555"/>
                 </a:solidFill>
                 <a:latin typeface="Zilla Slab"/>
               </a:rPr>
               <a:t>nozilla</a:t>
+            </a:r>
+            <a:r>
+              <a:rPr b="1" sz="1428">
+                <a:solidFill>
+                  <a:srgbClr val="00FF9C"/>
+                </a:solidFill>
+                <a:latin typeface="Zilla Slab"/>
+              </a:rPr>
+              <a:t>.</a:t>
             </a:r>
           </a:p>
         </p:txBody>
@@ -11319,7 +11356,7 @@
             <a:avLst/>
           </a:prstGeom>
           <a:solidFill>
-            <a:srgbClr val="FFFEE5"/>
+            <a:srgbClr val="FFFFFF"/>
           </a:solidFill>
           <a:ln>
             <a:noFill/>
@@ -11568,7 +11605,7 @@
             <a:avLst/>
           </a:prstGeom>
           <a:solidFill>
-            <a:srgbClr val="FFFEE5"/>
+            <a:srgbClr val="FFFFFF"/>
           </a:solidFill>
           <a:ln w="25400">
             <a:solidFill>
@@ -11775,7 +11812,7 @@
             <a:avLst/>
           </a:prstGeom>
           <a:solidFill>
-            <a:srgbClr val="FFFEE5"/>
+            <a:srgbClr val="FFFFFF"/>
           </a:solidFill>
           <a:ln w="25400">
             <a:solidFill>
@@ -11982,7 +12019,7 @@
             <a:avLst/>
           </a:prstGeom>
           <a:solidFill>
-            <a:srgbClr val="FFFEE5"/>
+            <a:srgbClr val="FFFFFF"/>
           </a:solidFill>
           <a:ln w="25400">
             <a:solidFill>
@@ -12182,33 +12219,37 @@
         </p:nvSpPr>
         <p:spPr>
           <a:xfrm>
-            <a:off x="777240" y="6327648"/>
-            <a:ext cx="2743200" cy="274320"/>
-          </a:xfrm>
-          <a:prstGeom prst="rect">
-            <a:avLst/>
-          </a:prstGeom>
-          <a:noFill/>
-        </p:spPr>
-        <p:txBody>
-          <a:bodyPr wrap="square" lIns="0" rIns="0" tIns="0" bIns="0" anchor="t">
-            <a:spAutoFit/>
-          </a:bodyPr>
-          <a:lstStyle/>
-          <a:p>
-            <a:pPr algn="l">
-              <a:lnSpc>
-                <a:spcPct val="100000"/>
-              </a:lnSpc>
-            </a:pPr>
-            <a:r>
-              <a:rPr sz="1200" b="1">
+            <a:off x="777240" y="6309360"/>
+            <a:ext cx="480060" cy="130576"/>
+          </a:xfrm>
+          <a:prstGeom prst="rect">
+            <a:avLst/>
+          </a:prstGeom>
+          <a:noFill/>
+        </p:spPr>
+        <p:txBody>
+          <a:bodyPr wrap="none" lIns="0" rIns="0" tIns="0" bIns="0">
+            <a:spAutoFit/>
+          </a:bodyPr>
+          <a:lstStyle/>
+          <a:p>
+            <a:r>
+              <a:rPr b="1" sz="1428">
                 <a:solidFill>
                   <a:srgbClr val="555555"/>
                 </a:solidFill>
                 <a:latin typeface="Zilla Slab"/>
               </a:rPr>
               <a:t>nozilla</a:t>
+            </a:r>
+            <a:r>
+              <a:rPr b="1" sz="1428">
+                <a:solidFill>
+                  <a:srgbClr val="00FF9C"/>
+                </a:solidFill>
+                <a:latin typeface="Zilla Slab"/>
+              </a:rPr>
+              <a:t>.</a:t>
             </a:r>
           </a:p>
         </p:txBody>
@@ -12652,7 +12693,7 @@
                 </a:solidFill>
                 <a:latin typeface="Space Mono"/>
               </a:rPr>
-              <a:t>CI@NOZILLA.DE · NOZILLA.DE</a:t>
+              <a:t>contact@nozilla.de · nozilla.de</a:t>
             </a:r>
           </a:p>
         </p:txBody>
@@ -12665,8 +12706,8 @@
         </p:nvSpPr>
         <p:spPr>
           <a:xfrm>
-            <a:off x="9402775" y="5029200"/>
-            <a:ext cx="2011680" cy="643737"/>
+            <a:off x="9219895" y="5029200"/>
+            <a:ext cx="2286000" cy="621792"/>
           </a:xfrm>
           <a:prstGeom prst="rect">
             <a:avLst/>
@@ -12680,13 +12721,22 @@
           <a:lstStyle/>
           <a:p>
             <a:r>
-              <a:rPr b="1" sz="7480">
+              <a:rPr b="1" sz="6800">
                 <a:solidFill>
                   <a:srgbClr val="FFFEE5"/>
                 </a:solidFill>
                 <a:latin typeface="Zilla Slab"/>
               </a:rPr>
               <a:t>nozilla</a:t>
+            </a:r>
+            <a:r>
+              <a:rPr b="1" sz="6800">
+                <a:solidFill>
+                  <a:srgbClr val="00FF9C"/>
+                </a:solidFill>
+                <a:latin typeface="Zilla Slab"/>
+              </a:rPr>
+              <a:t>.</a:t>
             </a:r>
           </a:p>
         </p:txBody>
@@ -12724,7 +12774,7 @@
             <a:avLst/>
           </a:prstGeom>
           <a:solidFill>
-            <a:srgbClr val="FFFEE5"/>
+            <a:srgbClr val="FFFFFF"/>
           </a:solidFill>
           <a:ln>
             <a:noFill/>
@@ -13678,33 +13728,37 @@
         </p:nvSpPr>
         <p:spPr>
           <a:xfrm>
-            <a:off x="777240" y="6327648"/>
-            <a:ext cx="2743200" cy="274320"/>
-          </a:xfrm>
-          <a:prstGeom prst="rect">
-            <a:avLst/>
-          </a:prstGeom>
-          <a:noFill/>
-        </p:spPr>
-        <p:txBody>
-          <a:bodyPr wrap="square" lIns="0" rIns="0" tIns="0" bIns="0" anchor="t">
-            <a:spAutoFit/>
-          </a:bodyPr>
-          <a:lstStyle/>
-          <a:p>
-            <a:pPr algn="l">
-              <a:lnSpc>
-                <a:spcPct val="100000"/>
-              </a:lnSpc>
-            </a:pPr>
-            <a:r>
-              <a:rPr sz="1200" b="1">
+            <a:off x="777240" y="6309360"/>
+            <a:ext cx="480060" cy="130576"/>
+          </a:xfrm>
+          <a:prstGeom prst="rect">
+            <a:avLst/>
+          </a:prstGeom>
+          <a:noFill/>
+        </p:spPr>
+        <p:txBody>
+          <a:bodyPr wrap="none" lIns="0" rIns="0" tIns="0" bIns="0">
+            <a:spAutoFit/>
+          </a:bodyPr>
+          <a:lstStyle/>
+          <a:p>
+            <a:r>
+              <a:rPr b="1" sz="1428">
                 <a:solidFill>
                   <a:srgbClr val="555555"/>
                 </a:solidFill>
                 <a:latin typeface="Zilla Slab"/>
               </a:rPr>
               <a:t>nozilla</a:t>
+            </a:r>
+            <a:r>
+              <a:rPr b="1" sz="1428">
+                <a:solidFill>
+                  <a:srgbClr val="00FF9C"/>
+                </a:solidFill>
+                <a:latin typeface="Zilla Slab"/>
+              </a:rPr>
+              <a:t>.</a:t>
             </a:r>
           </a:p>
         </p:txBody>
@@ -14146,7 +14200,7 @@
         <p:spPr>
           <a:xfrm>
             <a:off x="777240" y="5349240"/>
-            <a:ext cx="1828800" cy="585216"/>
+            <a:ext cx="2286000" cy="621792"/>
           </a:xfrm>
           <a:prstGeom prst="rect">
             <a:avLst/>
@@ -14167,6 +14221,15 @@
                 <a:latin typeface="Zilla Slab"/>
               </a:rPr>
               <a:t>nozilla</a:t>
+            </a:r>
+            <a:r>
+              <a:rPr b="1" sz="6800">
+                <a:solidFill>
+                  <a:srgbClr val="00FF9C"/>
+                </a:solidFill>
+                <a:latin typeface="Zilla Slab"/>
+              </a:rPr>
+              <a:t>.</a:t>
             </a:r>
           </a:p>
         </p:txBody>
@@ -14204,7 +14267,7 @@
             <a:avLst/>
           </a:prstGeom>
           <a:solidFill>
-            <a:srgbClr val="FFFEE5"/>
+            <a:srgbClr val="FFFFFF"/>
           </a:solidFill>
           <a:ln>
             <a:noFill/>
@@ -15056,33 +15119,37 @@
         </p:nvSpPr>
         <p:spPr>
           <a:xfrm>
-            <a:off x="777240" y="6327648"/>
-            <a:ext cx="2743200" cy="274320"/>
-          </a:xfrm>
-          <a:prstGeom prst="rect">
-            <a:avLst/>
-          </a:prstGeom>
-          <a:noFill/>
-        </p:spPr>
-        <p:txBody>
-          <a:bodyPr wrap="square" lIns="0" rIns="0" tIns="0" bIns="0" anchor="t">
-            <a:spAutoFit/>
-          </a:bodyPr>
-          <a:lstStyle/>
-          <a:p>
-            <a:pPr algn="l">
-              <a:lnSpc>
-                <a:spcPct val="100000"/>
-              </a:lnSpc>
-            </a:pPr>
-            <a:r>
-              <a:rPr sz="1200" b="1">
+            <a:off x="777240" y="6309360"/>
+            <a:ext cx="480060" cy="130576"/>
+          </a:xfrm>
+          <a:prstGeom prst="rect">
+            <a:avLst/>
+          </a:prstGeom>
+          <a:noFill/>
+        </p:spPr>
+        <p:txBody>
+          <a:bodyPr wrap="none" lIns="0" rIns="0" tIns="0" bIns="0">
+            <a:spAutoFit/>
+          </a:bodyPr>
+          <a:lstStyle/>
+          <a:p>
+            <a:r>
+              <a:rPr b="1" sz="1428">
                 <a:solidFill>
                   <a:srgbClr val="555555"/>
                 </a:solidFill>
                 <a:latin typeface="Zilla Slab"/>
               </a:rPr>
               <a:t>nozilla</a:t>
+            </a:r>
+            <a:r>
+              <a:rPr b="1" sz="1428">
+                <a:solidFill>
+                  <a:srgbClr val="00FF9C"/>
+                </a:solidFill>
+                <a:latin typeface="Zilla Slab"/>
+              </a:rPr>
+              <a:t>.</a:t>
             </a:r>
           </a:p>
         </p:txBody>
@@ -15637,7 +15704,7 @@
             <a:avLst/>
           </a:prstGeom>
           <a:solidFill>
-            <a:srgbClr val="FFFEE5"/>
+            <a:srgbClr val="FFFFFF"/>
           </a:solidFill>
           <a:ln>
             <a:noFill/>
@@ -15966,33 +16033,37 @@
         </p:nvSpPr>
         <p:spPr>
           <a:xfrm>
-            <a:off x="777240" y="6327648"/>
-            <a:ext cx="2743200" cy="274320"/>
-          </a:xfrm>
-          <a:prstGeom prst="rect">
-            <a:avLst/>
-          </a:prstGeom>
-          <a:noFill/>
-        </p:spPr>
-        <p:txBody>
-          <a:bodyPr wrap="square" lIns="0" rIns="0" tIns="0" bIns="0" anchor="t">
-            <a:spAutoFit/>
-          </a:bodyPr>
-          <a:lstStyle/>
-          <a:p>
-            <a:pPr algn="l">
-              <a:lnSpc>
-                <a:spcPct val="100000"/>
-              </a:lnSpc>
-            </a:pPr>
-            <a:r>
-              <a:rPr sz="1200" b="1">
+            <a:off x="777240" y="6309360"/>
+            <a:ext cx="480060" cy="130576"/>
+          </a:xfrm>
+          <a:prstGeom prst="rect">
+            <a:avLst/>
+          </a:prstGeom>
+          <a:noFill/>
+        </p:spPr>
+        <p:txBody>
+          <a:bodyPr wrap="none" lIns="0" rIns="0" tIns="0" bIns="0">
+            <a:spAutoFit/>
+          </a:bodyPr>
+          <a:lstStyle/>
+          <a:p>
+            <a:r>
+              <a:rPr b="1" sz="1428">
                 <a:solidFill>
                   <a:srgbClr val="555555"/>
                 </a:solidFill>
                 <a:latin typeface="Zilla Slab"/>
               </a:rPr>
               <a:t>nozilla</a:t>
+            </a:r>
+            <a:r>
+              <a:rPr b="1" sz="1428">
+                <a:solidFill>
+                  <a:srgbClr val="00FF9C"/>
+                </a:solidFill>
+                <a:latin typeface="Zilla Slab"/>
+              </a:rPr>
+              <a:t>.</a:t>
             </a:r>
           </a:p>
         </p:txBody>
@@ -16069,7 +16140,7 @@
             <a:avLst/>
           </a:prstGeom>
           <a:solidFill>
-            <a:srgbClr val="FFFEE5"/>
+            <a:srgbClr val="FFFFFF"/>
           </a:solidFill>
           <a:ln>
             <a:noFill/>
@@ -16555,33 +16626,37 @@
         </p:nvSpPr>
         <p:spPr>
           <a:xfrm>
-            <a:off x="777240" y="6327648"/>
-            <a:ext cx="2743200" cy="274320"/>
-          </a:xfrm>
-          <a:prstGeom prst="rect">
-            <a:avLst/>
-          </a:prstGeom>
-          <a:noFill/>
-        </p:spPr>
-        <p:txBody>
-          <a:bodyPr wrap="square" lIns="0" rIns="0" tIns="0" bIns="0" anchor="t">
-            <a:spAutoFit/>
-          </a:bodyPr>
-          <a:lstStyle/>
-          <a:p>
-            <a:pPr algn="l">
-              <a:lnSpc>
-                <a:spcPct val="100000"/>
-              </a:lnSpc>
-            </a:pPr>
-            <a:r>
-              <a:rPr sz="1200" b="1">
+            <a:off x="777240" y="6309360"/>
+            <a:ext cx="480060" cy="130576"/>
+          </a:xfrm>
+          <a:prstGeom prst="rect">
+            <a:avLst/>
+          </a:prstGeom>
+          <a:noFill/>
+        </p:spPr>
+        <p:txBody>
+          <a:bodyPr wrap="none" lIns="0" rIns="0" tIns="0" bIns="0">
+            <a:spAutoFit/>
+          </a:bodyPr>
+          <a:lstStyle/>
+          <a:p>
+            <a:r>
+              <a:rPr b="1" sz="1428">
                 <a:solidFill>
                   <a:srgbClr val="555555"/>
                 </a:solidFill>
                 <a:latin typeface="Zilla Slab"/>
               </a:rPr>
               <a:t>nozilla</a:t>
+            </a:r>
+            <a:r>
+              <a:rPr b="1" sz="1428">
+                <a:solidFill>
+                  <a:srgbClr val="00FF9C"/>
+                </a:solidFill>
+                <a:latin typeface="Zilla Slab"/>
+              </a:rPr>
+              <a:t>.</a:t>
             </a:r>
           </a:p>
         </p:txBody>
@@ -16658,7 +16733,7 @@
             <a:avLst/>
           </a:prstGeom>
           <a:solidFill>
-            <a:srgbClr val="FFFEE5"/>
+            <a:srgbClr val="FFFFFF"/>
           </a:solidFill>
           <a:ln>
             <a:noFill/>
@@ -16907,7 +16982,7 @@
             <a:avLst/>
           </a:prstGeom>
           <a:solidFill>
-            <a:srgbClr val="FFFEE5"/>
+            <a:srgbClr val="FFFFFF"/>
           </a:solidFill>
           <a:ln w="25400">
             <a:solidFill>
@@ -17251,7 +17326,7 @@
             <a:avLst/>
           </a:prstGeom>
           <a:solidFill>
-            <a:srgbClr val="FFFEE5"/>
+            <a:srgbClr val="FFFFFF"/>
           </a:solidFill>
           <a:ln w="25400">
             <a:solidFill>
@@ -17577,7 +17652,7 @@
             <a:avLst/>
           </a:prstGeom>
           <a:solidFill>
-            <a:srgbClr val="FFFEE5"/>
+            <a:srgbClr val="FFFFFF"/>
           </a:solidFill>
           <a:ln w="25400">
             <a:solidFill>
@@ -17817,33 +17892,37 @@
         </p:nvSpPr>
         <p:spPr>
           <a:xfrm>
-            <a:off x="777240" y="6327648"/>
-            <a:ext cx="2743200" cy="274320"/>
-          </a:xfrm>
-          <a:prstGeom prst="rect">
-            <a:avLst/>
-          </a:prstGeom>
-          <a:noFill/>
-        </p:spPr>
-        <p:txBody>
-          <a:bodyPr wrap="square" lIns="0" rIns="0" tIns="0" bIns="0" anchor="t">
-            <a:spAutoFit/>
-          </a:bodyPr>
-          <a:lstStyle/>
-          <a:p>
-            <a:pPr algn="l">
-              <a:lnSpc>
-                <a:spcPct val="100000"/>
-              </a:lnSpc>
-            </a:pPr>
-            <a:r>
-              <a:rPr sz="1200" b="1">
+            <a:off x="777240" y="6309360"/>
+            <a:ext cx="480060" cy="130576"/>
+          </a:xfrm>
+          <a:prstGeom prst="rect">
+            <a:avLst/>
+          </a:prstGeom>
+          <a:noFill/>
+        </p:spPr>
+        <p:txBody>
+          <a:bodyPr wrap="none" lIns="0" rIns="0" tIns="0" bIns="0">
+            <a:spAutoFit/>
+          </a:bodyPr>
+          <a:lstStyle/>
+          <a:p>
+            <a:r>
+              <a:rPr b="1" sz="1428">
                 <a:solidFill>
                   <a:srgbClr val="555555"/>
                 </a:solidFill>
                 <a:latin typeface="Zilla Slab"/>
               </a:rPr>
               <a:t>nozilla</a:t>
+            </a:r>
+            <a:r>
+              <a:rPr b="1" sz="1428">
+                <a:solidFill>
+                  <a:srgbClr val="00FF9C"/>
+                </a:solidFill>
+                <a:latin typeface="Zilla Slab"/>
+              </a:rPr>
+              <a:t>.</a:t>
             </a:r>
           </a:p>
         </p:txBody>
@@ -17920,7 +17999,7 @@
             <a:avLst/>
           </a:prstGeom>
           <a:solidFill>
-            <a:srgbClr val="FFFEE5"/>
+            <a:srgbClr val="FFFFFF"/>
           </a:solidFill>
           <a:ln>
             <a:noFill/>
@@ -18222,33 +18301,37 @@
         </p:nvSpPr>
         <p:spPr>
           <a:xfrm>
-            <a:off x="777240" y="6327648"/>
-            <a:ext cx="2743200" cy="274320"/>
-          </a:xfrm>
-          <a:prstGeom prst="rect">
-            <a:avLst/>
-          </a:prstGeom>
-          <a:noFill/>
-        </p:spPr>
-        <p:txBody>
-          <a:bodyPr wrap="square" lIns="0" rIns="0" tIns="0" bIns="0" anchor="t">
-            <a:spAutoFit/>
-          </a:bodyPr>
-          <a:lstStyle/>
-          <a:p>
-            <a:pPr algn="l">
-              <a:lnSpc>
-                <a:spcPct val="100000"/>
-              </a:lnSpc>
-            </a:pPr>
-            <a:r>
-              <a:rPr sz="1200" b="1">
+            <a:off x="777240" y="6309360"/>
+            <a:ext cx="480060" cy="130576"/>
+          </a:xfrm>
+          <a:prstGeom prst="rect">
+            <a:avLst/>
+          </a:prstGeom>
+          <a:noFill/>
+        </p:spPr>
+        <p:txBody>
+          <a:bodyPr wrap="none" lIns="0" rIns="0" tIns="0" bIns="0">
+            <a:spAutoFit/>
+          </a:bodyPr>
+          <a:lstStyle/>
+          <a:p>
+            <a:r>
+              <a:rPr b="1" sz="1428">
                 <a:solidFill>
                   <a:srgbClr val="555555"/>
                 </a:solidFill>
                 <a:latin typeface="Zilla Slab"/>
               </a:rPr>
               <a:t>nozilla</a:t>
+            </a:r>
+            <a:r>
+              <a:rPr b="1" sz="1428">
+                <a:solidFill>
+                  <a:srgbClr val="00FF9C"/>
+                </a:solidFill>
+                <a:latin typeface="Zilla Slab"/>
+              </a:rPr>
+              <a:t>.</a:t>
             </a:r>
           </a:p>
         </p:txBody>

--- a/templates/google-slides/nozilla-slides-master.pptx
+++ b/templates/google-slides/nozilla-slides-master.pptx
@@ -8307,7 +8307,51 @@
       </p:sp>
       <p:sp>
         <p:nvSpPr>
-          <p:cNvPr id="8" name="TextBox 7"/>
+          <p:cNvPr id="8" name="Rectangle 7"/>
+          <p:cNvSpPr/>
+          <p:nvPr/>
+        </p:nvSpPr>
+        <p:spPr>
+          <a:xfrm>
+            <a:off x="1355884" y="2956084"/>
+            <a:ext cx="64294" cy="64294"/>
+          </a:xfrm>
+          <a:prstGeom prst="rect">
+            <a:avLst/>
+          </a:prstGeom>
+          <a:solidFill>
+            <a:srgbClr val="00FF9C"/>
+          </a:solidFill>
+          <a:ln>
+            <a:noFill/>
+          </a:ln>
+          <a:effectLst/>
+        </p:spPr>
+        <p:style>
+          <a:lnRef idx="1">
+            <a:schemeClr val="accent1"/>
+          </a:lnRef>
+          <a:fillRef idx="3">
+            <a:schemeClr val="accent1"/>
+          </a:fillRef>
+          <a:effectRef idx="2">
+            <a:schemeClr val="accent1"/>
+          </a:effectRef>
+          <a:fontRef idx="minor">
+            <a:schemeClr val="lt1"/>
+          </a:fontRef>
+        </p:style>
+        <p:txBody>
+          <a:bodyPr rtlCol="0" anchor="ctr"/>
+          <a:lstStyle/>
+          <a:p>
+            <a:pPr algn="ctr"/>
+          </a:p>
+        </p:txBody>
+      </p:sp>
+      <p:sp>
+        <p:nvSpPr>
+          <p:cNvPr id="9" name="TextBox 8"/>
           <p:cNvSpPr txBox="1"/>
           <p:nvPr/>
         </p:nvSpPr>
@@ -8346,7 +8390,7 @@
       </p:sp>
       <p:sp>
         <p:nvSpPr>
-          <p:cNvPr id="9" name="TextBox 8"/>
+          <p:cNvPr id="10" name="TextBox 9"/>
           <p:cNvSpPr txBox="1"/>
           <p:nvPr/>
         </p:nvSpPr>
@@ -8385,14 +8429,14 @@
       </p:sp>
       <p:sp>
         <p:nvSpPr>
-          <p:cNvPr id="10" name="Rectangle 9"/>
+          <p:cNvPr id="11" name="Rectangle 10"/>
           <p:cNvSpPr/>
           <p:nvPr/>
         </p:nvSpPr>
         <p:spPr>
           <a:xfrm>
-            <a:off x="4561103" y="2506028"/>
-            <a:ext cx="514350" cy="428625"/>
+            <a:off x="4539672" y="2506028"/>
+            <a:ext cx="482203" cy="407194"/>
           </a:xfrm>
           <a:prstGeom prst="rect">
             <a:avLst/>
@@ -8429,14 +8473,14 @@
       </p:sp>
       <p:cxnSp>
         <p:nvCxnSpPr>
-          <p:cNvPr id="11" name="Connector 10"/>
+          <p:cNvPr id="12" name="Connector 11"/>
           <p:cNvCxnSpPr/>
           <p:nvPr/>
         </p:nvCxnSpPr>
         <p:spPr>
           <a:xfrm>
-            <a:off x="4561103" y="2623899"/>
-            <a:ext cx="514350" cy="0"/>
+            <a:off x="4539672" y="2623899"/>
+            <a:ext cx="482203" cy="0"/>
           </a:xfrm>
           <a:prstGeom prst="line">
             <a:avLst/>
@@ -8465,14 +8509,14 @@
       </p:cxnSp>
       <p:sp>
         <p:nvSpPr>
-          <p:cNvPr id="12" name="Freeform 11"/>
+          <p:cNvPr id="13" name="Freeform 12"/>
           <p:cNvSpPr/>
           <p:nvPr/>
         </p:nvSpPr>
         <p:spPr>
           <a:xfrm>
-            <a:off x="4646828" y="2731056"/>
-            <a:ext cx="64294" cy="107156"/>
+            <a:off x="4625397" y="2709624"/>
+            <a:ext cx="64294" cy="107157"/>
           </a:xfrm>
           <a:custGeom>
             <a:avLst/>
@@ -8481,7 +8525,7 @@
             <a:cxnLst/>
             <a:rect l="l" t="t" r="r" b="b"/>
             <a:pathLst>
-              <a:path w="64294" h="107156">
+              <a:path w="64294" h="107157">
                 <a:moveTo>
                   <a:pt x="0" y="0"/>
                 </a:moveTo>
@@ -8489,7 +8533,7 @@
                   <a:pt x="64294" y="53578"/>
                 </a:lnTo>
                 <a:lnTo>
-                  <a:pt x="0" y="107156"/>
+                  <a:pt x="0" y="107157"/>
                 </a:lnTo>
               </a:path>
             </a:pathLst>
@@ -8526,14 +8570,14 @@
       </p:sp>
       <p:cxnSp>
         <p:nvCxnSpPr>
-          <p:cNvPr id="13" name="Connector 12"/>
+          <p:cNvPr id="14" name="Connector 13"/>
           <p:cNvCxnSpPr/>
           <p:nvPr/>
         </p:nvCxnSpPr>
         <p:spPr>
           <a:xfrm>
-            <a:off x="4775416" y="2838212"/>
-            <a:ext cx="150019" cy="0"/>
+            <a:off x="4753985" y="2816781"/>
+            <a:ext cx="171450" cy="0"/>
           </a:xfrm>
           <a:prstGeom prst="line">
             <a:avLst/>
@@ -8562,7 +8606,51 @@
       </p:cxnSp>
       <p:sp>
         <p:nvSpPr>
-          <p:cNvPr id="14" name="TextBox 13"/>
+          <p:cNvPr id="15" name="Rectangle 14"/>
+          <p:cNvSpPr/>
+          <p:nvPr/>
+        </p:nvSpPr>
+        <p:spPr>
+          <a:xfrm>
+            <a:off x="5054022" y="2956084"/>
+            <a:ext cx="64294" cy="64294"/>
+          </a:xfrm>
+          <a:prstGeom prst="rect">
+            <a:avLst/>
+          </a:prstGeom>
+          <a:solidFill>
+            <a:srgbClr val="00FF9C"/>
+          </a:solidFill>
+          <a:ln>
+            <a:noFill/>
+          </a:ln>
+          <a:effectLst/>
+        </p:spPr>
+        <p:style>
+          <a:lnRef idx="1">
+            <a:schemeClr val="accent1"/>
+          </a:lnRef>
+          <a:fillRef idx="3">
+            <a:schemeClr val="accent1"/>
+          </a:fillRef>
+          <a:effectRef idx="2">
+            <a:schemeClr val="accent1"/>
+          </a:effectRef>
+          <a:fontRef idx="minor">
+            <a:schemeClr val="lt1"/>
+          </a:fontRef>
+        </p:style>
+        <p:txBody>
+          <a:bodyPr rtlCol="0" anchor="ctr"/>
+          <a:lstStyle/>
+          <a:p>
+            <a:pPr algn="ctr"/>
+          </a:p>
+        </p:txBody>
+      </p:sp>
+      <p:sp>
+        <p:nvSpPr>
+          <p:cNvPr id="16" name="TextBox 15"/>
           <p:cNvSpPr txBox="1"/>
           <p:nvPr/>
         </p:nvSpPr>
@@ -8601,7 +8689,7 @@
       </p:sp>
       <p:sp>
         <p:nvSpPr>
-          <p:cNvPr id="15" name="TextBox 14"/>
+          <p:cNvPr id="17" name="TextBox 16"/>
           <p:cNvSpPr txBox="1"/>
           <p:nvPr/>
         </p:nvSpPr>
@@ -8640,14 +8728,14 @@
       </p:sp>
       <p:sp>
         <p:nvSpPr>
-          <p:cNvPr id="16" name="Freeform 15"/>
+          <p:cNvPr id="18" name="Freeform 17"/>
           <p:cNvSpPr/>
           <p:nvPr/>
         </p:nvSpPr>
         <p:spPr>
           <a:xfrm>
-            <a:off x="8302104" y="2506028"/>
-            <a:ext cx="428625" cy="428624"/>
+            <a:off x="8280673" y="2484596"/>
+            <a:ext cx="428625" cy="428625"/>
           </a:xfrm>
           <a:custGeom>
             <a:avLst/>
@@ -8656,7 +8744,7 @@
             <a:cxnLst/>
             <a:rect l="l" t="t" r="r" b="b"/>
             <a:pathLst>
-              <a:path w="428625" h="428624">
+              <a:path w="428625" h="428625">
                 <a:moveTo>
                   <a:pt x="0" y="0"/>
                 </a:moveTo>
@@ -8664,16 +8752,16 @@
                   <a:pt x="428625" y="0"/>
                 </a:lnTo>
                 <a:lnTo>
-                  <a:pt x="428625" y="428624"/>
+                  <a:pt x="428625" y="428625"/>
                 </a:lnTo>
                 <a:lnTo>
-                  <a:pt x="85725" y="428624"/>
+                  <a:pt x="85725" y="428625"/>
                 </a:lnTo>
                 <a:lnTo>
-                  <a:pt x="85725" y="85724"/>
+                  <a:pt x="85725" y="85725"/>
                 </a:lnTo>
                 <a:lnTo>
-                  <a:pt x="342900" y="85724"/>
+                  <a:pt x="342900" y="85725"/>
                 </a:lnTo>
                 <a:lnTo>
                   <a:pt x="342900" y="342900"/>
@@ -8722,7 +8810,51 @@
       </p:sp>
       <p:sp>
         <p:nvSpPr>
-          <p:cNvPr id="17" name="TextBox 16"/>
+          <p:cNvPr id="19" name="Rectangle 18"/>
+          <p:cNvSpPr/>
+          <p:nvPr/>
+        </p:nvSpPr>
+        <p:spPr>
+          <a:xfrm>
+            <a:off x="8752161" y="2956084"/>
+            <a:ext cx="64294" cy="64294"/>
+          </a:xfrm>
+          <a:prstGeom prst="rect">
+            <a:avLst/>
+          </a:prstGeom>
+          <a:solidFill>
+            <a:srgbClr val="00FF9C"/>
+          </a:solidFill>
+          <a:ln>
+            <a:noFill/>
+          </a:ln>
+          <a:effectLst/>
+        </p:spPr>
+        <p:style>
+          <a:lnRef idx="1">
+            <a:schemeClr val="accent1"/>
+          </a:lnRef>
+          <a:fillRef idx="3">
+            <a:schemeClr val="accent1"/>
+          </a:fillRef>
+          <a:effectRef idx="2">
+            <a:schemeClr val="accent1"/>
+          </a:effectRef>
+          <a:fontRef idx="minor">
+            <a:schemeClr val="lt1"/>
+          </a:fontRef>
+        </p:style>
+        <p:txBody>
+          <a:bodyPr rtlCol="0" anchor="ctr"/>
+          <a:lstStyle/>
+          <a:p>
+            <a:pPr algn="ctr"/>
+          </a:p>
+        </p:txBody>
+      </p:sp>
+      <p:sp>
+        <p:nvSpPr>
+          <p:cNvPr id="20" name="TextBox 19"/>
           <p:cNvSpPr txBox="1"/>
           <p:nvPr/>
         </p:nvSpPr>
@@ -8761,7 +8893,7 @@
       </p:sp>
       <p:sp>
         <p:nvSpPr>
-          <p:cNvPr id="18" name="TextBox 17"/>
+          <p:cNvPr id="21" name="TextBox 20"/>
           <p:cNvSpPr txBox="1"/>
           <p:nvPr/>
         </p:nvSpPr>
@@ -8800,7 +8932,7 @@
       </p:sp>
       <p:sp>
         <p:nvSpPr>
-          <p:cNvPr id="19" name="Freeform 18"/>
+          <p:cNvPr id="22" name="Freeform 21"/>
           <p:cNvSpPr/>
           <p:nvPr/>
         </p:nvSpPr>
@@ -8874,7 +9006,7 @@
       </p:sp>
       <p:sp>
         <p:nvSpPr>
-          <p:cNvPr id="20" name="Oval 19"/>
+          <p:cNvPr id="23" name="Oval 22"/>
           <p:cNvSpPr/>
           <p:nvPr/>
         </p:nvSpPr>
@@ -8918,7 +9050,7 @@
       </p:sp>
       <p:sp>
         <p:nvSpPr>
-          <p:cNvPr id="21" name="Oval 20"/>
+          <p:cNvPr id="24" name="Oval 23"/>
           <p:cNvSpPr/>
           <p:nvPr/>
         </p:nvSpPr>
@@ -8962,7 +9094,7 @@
       </p:sp>
       <p:sp>
         <p:nvSpPr>
-          <p:cNvPr id="22" name="Oval 21"/>
+          <p:cNvPr id="25" name="Oval 24"/>
           <p:cNvSpPr/>
           <p:nvPr/>
         </p:nvSpPr>
@@ -9006,7 +9138,51 @@
       </p:sp>
       <p:sp>
         <p:nvSpPr>
-          <p:cNvPr id="23" name="TextBox 22"/>
+          <p:cNvPr id="26" name="Rectangle 25"/>
+          <p:cNvSpPr/>
+          <p:nvPr/>
+        </p:nvSpPr>
+        <p:spPr>
+          <a:xfrm>
+            <a:off x="1355884" y="4556284"/>
+            <a:ext cx="64294" cy="64294"/>
+          </a:xfrm>
+          <a:prstGeom prst="rect">
+            <a:avLst/>
+          </a:prstGeom>
+          <a:solidFill>
+            <a:srgbClr val="00FF9C"/>
+          </a:solidFill>
+          <a:ln>
+            <a:noFill/>
+          </a:ln>
+          <a:effectLst/>
+        </p:spPr>
+        <p:style>
+          <a:lnRef idx="1">
+            <a:schemeClr val="accent1"/>
+          </a:lnRef>
+          <a:fillRef idx="3">
+            <a:schemeClr val="accent1"/>
+          </a:fillRef>
+          <a:effectRef idx="2">
+            <a:schemeClr val="accent1"/>
+          </a:effectRef>
+          <a:fontRef idx="minor">
+            <a:schemeClr val="lt1"/>
+          </a:fontRef>
+        </p:style>
+        <p:txBody>
+          <a:bodyPr rtlCol="0" anchor="ctr"/>
+          <a:lstStyle/>
+          <a:p>
+            <a:pPr algn="ctr"/>
+          </a:p>
+        </p:txBody>
+      </p:sp>
+      <p:sp>
+        <p:nvSpPr>
+          <p:cNvPr id="27" name="TextBox 26"/>
           <p:cNvSpPr txBox="1"/>
           <p:nvPr/>
         </p:nvSpPr>
@@ -9045,7 +9221,7 @@
       </p:sp>
       <p:sp>
         <p:nvSpPr>
-          <p:cNvPr id="24" name="TextBox 23"/>
+          <p:cNvPr id="28" name="TextBox 27"/>
           <p:cNvSpPr txBox="1"/>
           <p:nvPr/>
         </p:nvSpPr>
@@ -9084,7 +9260,7 @@
       </p:sp>
       <p:sp>
         <p:nvSpPr>
-          <p:cNvPr id="25" name="Oval 24"/>
+          <p:cNvPr id="29" name="Oval 28"/>
           <p:cNvSpPr/>
           <p:nvPr/>
         </p:nvSpPr>
@@ -9128,7 +9304,7 @@
       </p:sp>
       <p:sp>
         <p:nvSpPr>
-          <p:cNvPr id="26" name="Oval 25"/>
+          <p:cNvPr id="30" name="Oval 29"/>
           <p:cNvSpPr/>
           <p:nvPr/>
         </p:nvSpPr>
@@ -9172,7 +9348,7 @@
       </p:sp>
       <p:cxnSp>
         <p:nvCxnSpPr>
-          <p:cNvPr id="27" name="Connector 26"/>
+          <p:cNvPr id="31" name="Connector 30"/>
           <p:cNvCxnSpPr/>
           <p:nvPr/>
         </p:nvCxnSpPr>
@@ -9180,150 +9356,6 @@
           <a:xfrm>
             <a:off x="4979013" y="4320540"/>
             <a:ext cx="64294" cy="0"/>
-          </a:xfrm>
-          <a:prstGeom prst="line">
-            <a:avLst/>
-          </a:prstGeom>
-          <a:ln w="42862">
-            <a:solidFill>
-              <a:srgbClr val="000000"/>
-            </a:solidFill>
-          </a:ln>
-          <a:effectLst/>
-        </p:spPr>
-        <p:style>
-          <a:lnRef idx="2">
-            <a:schemeClr val="accent1"/>
-          </a:lnRef>
-          <a:fillRef idx="0">
-            <a:schemeClr val="accent1"/>
-          </a:fillRef>
-          <a:effectRef idx="1">
-            <a:schemeClr val="accent1"/>
-          </a:effectRef>
-          <a:fontRef idx="minor">
-            <a:schemeClr val="tx1"/>
-          </a:fontRef>
-        </p:style>
-      </p:cxnSp>
-      <p:cxnSp>
-        <p:nvCxnSpPr>
-          <p:cNvPr id="28" name="Connector 27"/>
-          <p:cNvCxnSpPr/>
-          <p:nvPr/>
-        </p:nvCxnSpPr>
-        <p:spPr>
-          <a:xfrm>
-            <a:off x="4818278" y="4481274"/>
-            <a:ext cx="0" cy="64294"/>
-          </a:xfrm>
-          <a:prstGeom prst="line">
-            <a:avLst/>
-          </a:prstGeom>
-          <a:ln w="42862">
-            <a:solidFill>
-              <a:srgbClr val="000000"/>
-            </a:solidFill>
-          </a:ln>
-          <a:effectLst/>
-        </p:spPr>
-        <p:style>
-          <a:lnRef idx="2">
-            <a:schemeClr val="accent1"/>
-          </a:lnRef>
-          <a:fillRef idx="0">
-            <a:schemeClr val="accent1"/>
-          </a:fillRef>
-          <a:effectRef idx="1">
-            <a:schemeClr val="accent1"/>
-          </a:effectRef>
-          <a:fontRef idx="minor">
-            <a:schemeClr val="tx1"/>
-          </a:fontRef>
-        </p:style>
-      </p:cxnSp>
-      <p:cxnSp>
-        <p:nvCxnSpPr>
-          <p:cNvPr id="29" name="Connector 28"/>
-          <p:cNvCxnSpPr/>
-          <p:nvPr/>
-        </p:nvCxnSpPr>
-        <p:spPr>
-          <a:xfrm flipH="1">
-            <a:off x="4593250" y="4320540"/>
-            <a:ext cx="64294" cy="0"/>
-          </a:xfrm>
-          <a:prstGeom prst="line">
-            <a:avLst/>
-          </a:prstGeom>
-          <a:ln w="42862">
-            <a:solidFill>
-              <a:srgbClr val="000000"/>
-            </a:solidFill>
-          </a:ln>
-          <a:effectLst/>
-        </p:spPr>
-        <p:style>
-          <a:lnRef idx="2">
-            <a:schemeClr val="accent1"/>
-          </a:lnRef>
-          <a:fillRef idx="0">
-            <a:schemeClr val="accent1"/>
-          </a:fillRef>
-          <a:effectRef idx="1">
-            <a:schemeClr val="accent1"/>
-          </a:effectRef>
-          <a:fontRef idx="minor">
-            <a:schemeClr val="tx1"/>
-          </a:fontRef>
-        </p:style>
-      </p:cxnSp>
-      <p:cxnSp>
-        <p:nvCxnSpPr>
-          <p:cNvPr id="30" name="Connector 29"/>
-          <p:cNvCxnSpPr/>
-          <p:nvPr/>
-        </p:nvCxnSpPr>
-        <p:spPr>
-          <a:xfrm flipV="1">
-            <a:off x="4818278" y="4095512"/>
-            <a:ext cx="0" cy="64294"/>
-          </a:xfrm>
-          <a:prstGeom prst="line">
-            <a:avLst/>
-          </a:prstGeom>
-          <a:ln w="42862">
-            <a:solidFill>
-              <a:srgbClr val="000000"/>
-            </a:solidFill>
-          </a:ln>
-          <a:effectLst/>
-        </p:spPr>
-        <p:style>
-          <a:lnRef idx="2">
-            <a:schemeClr val="accent1"/>
-          </a:lnRef>
-          <a:fillRef idx="0">
-            <a:schemeClr val="accent1"/>
-          </a:fillRef>
-          <a:effectRef idx="1">
-            <a:schemeClr val="accent1"/>
-          </a:effectRef>
-          <a:fontRef idx="minor">
-            <a:schemeClr val="tx1"/>
-          </a:fontRef>
-        </p:style>
-      </p:cxnSp>
-      <p:cxnSp>
-        <p:nvCxnSpPr>
-          <p:cNvPr id="31" name="Connector 30"/>
-          <p:cNvCxnSpPr/>
-          <p:nvPr/>
-        </p:nvCxnSpPr>
-        <p:spPr>
-          <a:xfrm>
-            <a:off x="4931864" y="4434126"/>
-            <a:ext cx="47149" cy="47148"/>
           </a:xfrm>
           <a:prstGeom prst="line">
             <a:avLst/>
@@ -9357,9 +9389,9 @@
           <p:nvPr/>
         </p:nvCxnSpPr>
         <p:spPr>
-          <a:xfrm flipH="1">
-            <a:off x="4657544" y="4434126"/>
-            <a:ext cx="47149" cy="47148"/>
+          <a:xfrm>
+            <a:off x="4818278" y="4481274"/>
+            <a:ext cx="0" cy="64294"/>
           </a:xfrm>
           <a:prstGeom prst="line">
             <a:avLst/>
@@ -9393,9 +9425,9 @@
           <p:nvPr/>
         </p:nvCxnSpPr>
         <p:spPr>
-          <a:xfrm flipH="1" flipV="1">
-            <a:off x="4657544" y="4159806"/>
-            <a:ext cx="47149" cy="47148"/>
+          <a:xfrm flipH="1">
+            <a:off x="4593250" y="4320540"/>
+            <a:ext cx="64294" cy="0"/>
           </a:xfrm>
           <a:prstGeom prst="line">
             <a:avLst/>
@@ -9430,8 +9462,8 @@
         </p:nvCxnSpPr>
         <p:spPr>
           <a:xfrm flipV="1">
-            <a:off x="4931864" y="4159806"/>
-            <a:ext cx="47149" cy="47148"/>
+            <a:off x="4818278" y="4095512"/>
+            <a:ext cx="0" cy="64294"/>
           </a:xfrm>
           <a:prstGeom prst="line">
             <a:avLst/>
@@ -9458,9 +9490,197 @@
           </a:fontRef>
         </p:style>
       </p:cxnSp>
-      <p:sp>
-        <p:nvSpPr>
-          <p:cNvPr id="35" name="TextBox 34"/>
+      <p:cxnSp>
+        <p:nvCxnSpPr>
+          <p:cNvPr id="35" name="Connector 34"/>
+          <p:cNvCxnSpPr/>
+          <p:nvPr/>
+        </p:nvCxnSpPr>
+        <p:spPr>
+          <a:xfrm>
+            <a:off x="4931864" y="4434126"/>
+            <a:ext cx="47149" cy="47148"/>
+          </a:xfrm>
+          <a:prstGeom prst="line">
+            <a:avLst/>
+          </a:prstGeom>
+          <a:ln w="42862">
+            <a:solidFill>
+              <a:srgbClr val="000000"/>
+            </a:solidFill>
+          </a:ln>
+          <a:effectLst/>
+        </p:spPr>
+        <p:style>
+          <a:lnRef idx="2">
+            <a:schemeClr val="accent1"/>
+          </a:lnRef>
+          <a:fillRef idx="0">
+            <a:schemeClr val="accent1"/>
+          </a:fillRef>
+          <a:effectRef idx="1">
+            <a:schemeClr val="accent1"/>
+          </a:effectRef>
+          <a:fontRef idx="minor">
+            <a:schemeClr val="tx1"/>
+          </a:fontRef>
+        </p:style>
+      </p:cxnSp>
+      <p:cxnSp>
+        <p:nvCxnSpPr>
+          <p:cNvPr id="36" name="Connector 35"/>
+          <p:cNvCxnSpPr/>
+          <p:nvPr/>
+        </p:nvCxnSpPr>
+        <p:spPr>
+          <a:xfrm flipH="1">
+            <a:off x="4657544" y="4434126"/>
+            <a:ext cx="47149" cy="47148"/>
+          </a:xfrm>
+          <a:prstGeom prst="line">
+            <a:avLst/>
+          </a:prstGeom>
+          <a:ln w="42862">
+            <a:solidFill>
+              <a:srgbClr val="000000"/>
+            </a:solidFill>
+          </a:ln>
+          <a:effectLst/>
+        </p:spPr>
+        <p:style>
+          <a:lnRef idx="2">
+            <a:schemeClr val="accent1"/>
+          </a:lnRef>
+          <a:fillRef idx="0">
+            <a:schemeClr val="accent1"/>
+          </a:fillRef>
+          <a:effectRef idx="1">
+            <a:schemeClr val="accent1"/>
+          </a:effectRef>
+          <a:fontRef idx="minor">
+            <a:schemeClr val="tx1"/>
+          </a:fontRef>
+        </p:style>
+      </p:cxnSp>
+      <p:cxnSp>
+        <p:nvCxnSpPr>
+          <p:cNvPr id="37" name="Connector 36"/>
+          <p:cNvCxnSpPr/>
+          <p:nvPr/>
+        </p:nvCxnSpPr>
+        <p:spPr>
+          <a:xfrm flipH="1" flipV="1">
+            <a:off x="4657544" y="4159806"/>
+            <a:ext cx="47149" cy="47148"/>
+          </a:xfrm>
+          <a:prstGeom prst="line">
+            <a:avLst/>
+          </a:prstGeom>
+          <a:ln w="42862">
+            <a:solidFill>
+              <a:srgbClr val="000000"/>
+            </a:solidFill>
+          </a:ln>
+          <a:effectLst/>
+        </p:spPr>
+        <p:style>
+          <a:lnRef idx="2">
+            <a:schemeClr val="accent1"/>
+          </a:lnRef>
+          <a:fillRef idx="0">
+            <a:schemeClr val="accent1"/>
+          </a:fillRef>
+          <a:effectRef idx="1">
+            <a:schemeClr val="accent1"/>
+          </a:effectRef>
+          <a:fontRef idx="minor">
+            <a:schemeClr val="tx1"/>
+          </a:fontRef>
+        </p:style>
+      </p:cxnSp>
+      <p:cxnSp>
+        <p:nvCxnSpPr>
+          <p:cNvPr id="38" name="Connector 37"/>
+          <p:cNvCxnSpPr/>
+          <p:nvPr/>
+        </p:nvCxnSpPr>
+        <p:spPr>
+          <a:xfrm flipV="1">
+            <a:off x="4931864" y="4159806"/>
+            <a:ext cx="47149" cy="47148"/>
+          </a:xfrm>
+          <a:prstGeom prst="line">
+            <a:avLst/>
+          </a:prstGeom>
+          <a:ln w="42862">
+            <a:solidFill>
+              <a:srgbClr val="000000"/>
+            </a:solidFill>
+          </a:ln>
+          <a:effectLst/>
+        </p:spPr>
+        <p:style>
+          <a:lnRef idx="2">
+            <a:schemeClr val="accent1"/>
+          </a:lnRef>
+          <a:fillRef idx="0">
+            <a:schemeClr val="accent1"/>
+          </a:fillRef>
+          <a:effectRef idx="1">
+            <a:schemeClr val="accent1"/>
+          </a:effectRef>
+          <a:fontRef idx="minor">
+            <a:schemeClr val="tx1"/>
+          </a:fontRef>
+        </p:style>
+      </p:cxnSp>
+      <p:sp>
+        <p:nvSpPr>
+          <p:cNvPr id="39" name="Rectangle 38"/>
+          <p:cNvSpPr/>
+          <p:nvPr/>
+        </p:nvSpPr>
+        <p:spPr>
+          <a:xfrm>
+            <a:off x="5054022" y="4556284"/>
+            <a:ext cx="64294" cy="64294"/>
+          </a:xfrm>
+          <a:prstGeom prst="rect">
+            <a:avLst/>
+          </a:prstGeom>
+          <a:solidFill>
+            <a:srgbClr val="00FF9C"/>
+          </a:solidFill>
+          <a:ln>
+            <a:noFill/>
+          </a:ln>
+          <a:effectLst/>
+        </p:spPr>
+        <p:style>
+          <a:lnRef idx="1">
+            <a:schemeClr val="accent1"/>
+          </a:lnRef>
+          <a:fillRef idx="3">
+            <a:schemeClr val="accent1"/>
+          </a:fillRef>
+          <a:effectRef idx="2">
+            <a:schemeClr val="accent1"/>
+          </a:effectRef>
+          <a:fontRef idx="minor">
+            <a:schemeClr val="lt1"/>
+          </a:fontRef>
+        </p:style>
+        <p:txBody>
+          <a:bodyPr rtlCol="0" anchor="ctr"/>
+          <a:lstStyle/>
+          <a:p>
+            <a:pPr algn="ctr"/>
+          </a:p>
+        </p:txBody>
+      </p:sp>
+      <p:sp>
+        <p:nvSpPr>
+          <p:cNvPr id="40" name="TextBox 39"/>
           <p:cNvSpPr txBox="1"/>
           <p:nvPr/>
         </p:nvSpPr>
@@ -9499,7 +9719,7 @@
       </p:sp>
       <p:sp>
         <p:nvSpPr>
-          <p:cNvPr id="36" name="TextBox 35"/>
+          <p:cNvPr id="41" name="TextBox 40"/>
           <p:cNvSpPr txBox="1"/>
           <p:nvPr/>
         </p:nvSpPr>
@@ -9538,7 +9758,7 @@
       </p:sp>
       <p:sp>
         <p:nvSpPr>
-          <p:cNvPr id="37" name="Oval 36"/>
+          <p:cNvPr id="42" name="Oval 41"/>
           <p:cNvSpPr/>
           <p:nvPr/>
         </p:nvSpPr>
@@ -9584,7 +9804,7 @@
       </p:sp>
       <p:cxnSp>
         <p:nvCxnSpPr>
-          <p:cNvPr id="38" name="Connector 37"/>
+          <p:cNvPr id="43" name="Connector 42"/>
           <p:cNvCxnSpPr/>
           <p:nvPr/>
         </p:nvCxnSpPr>
@@ -9620,7 +9840,7 @@
       </p:cxnSp>
       <p:cxnSp>
         <p:nvCxnSpPr>
-          <p:cNvPr id="39" name="Connector 38"/>
+          <p:cNvPr id="44" name="Connector 43"/>
           <p:cNvCxnSpPr/>
           <p:nvPr/>
         </p:nvCxnSpPr>
@@ -9656,7 +9876,51 @@
       </p:cxnSp>
       <p:sp>
         <p:nvSpPr>
-          <p:cNvPr id="40" name="TextBox 39"/>
+          <p:cNvPr id="45" name="Rectangle 44"/>
+          <p:cNvSpPr/>
+          <p:nvPr/>
+        </p:nvSpPr>
+        <p:spPr>
+          <a:xfrm>
+            <a:off x="8752161" y="4556284"/>
+            <a:ext cx="64294" cy="64294"/>
+          </a:xfrm>
+          <a:prstGeom prst="rect">
+            <a:avLst/>
+          </a:prstGeom>
+          <a:solidFill>
+            <a:srgbClr val="00FF9C"/>
+          </a:solidFill>
+          <a:ln>
+            <a:noFill/>
+          </a:ln>
+          <a:effectLst/>
+        </p:spPr>
+        <p:style>
+          <a:lnRef idx="1">
+            <a:schemeClr val="accent1"/>
+          </a:lnRef>
+          <a:fillRef idx="3">
+            <a:schemeClr val="accent1"/>
+          </a:fillRef>
+          <a:effectRef idx="2">
+            <a:schemeClr val="accent1"/>
+          </a:effectRef>
+          <a:fontRef idx="minor">
+            <a:schemeClr val="lt1"/>
+          </a:fontRef>
+        </p:style>
+        <p:txBody>
+          <a:bodyPr rtlCol="0" anchor="ctr"/>
+          <a:lstStyle/>
+          <a:p>
+            <a:pPr algn="ctr"/>
+          </a:p>
+        </p:txBody>
+      </p:sp>
+      <p:sp>
+        <p:nvSpPr>
+          <p:cNvPr id="46" name="TextBox 45"/>
           <p:cNvSpPr txBox="1"/>
           <p:nvPr/>
         </p:nvSpPr>
@@ -9695,7 +9959,7 @@
       </p:sp>
       <p:sp>
         <p:nvSpPr>
-          <p:cNvPr id="41" name="TextBox 40"/>
+          <p:cNvPr id="47" name="TextBox 46"/>
           <p:cNvSpPr txBox="1"/>
           <p:nvPr/>
         </p:nvSpPr>
@@ -9734,7 +9998,7 @@
       </p:sp>
       <p:sp>
         <p:nvSpPr>
-          <p:cNvPr id="42" name="Rectangle 41"/>
+          <p:cNvPr id="48" name="Rectangle 47"/>
           <p:cNvSpPr/>
           <p:nvPr/>
         </p:nvSpPr>
@@ -9778,7 +10042,7 @@
       </p:sp>
       <p:sp>
         <p:nvSpPr>
-          <p:cNvPr id="43" name="TextBox 42"/>
+          <p:cNvPr id="49" name="TextBox 48"/>
           <p:cNvSpPr txBox="1"/>
           <p:nvPr/>
         </p:nvSpPr>
@@ -9821,7 +10085,7 @@
       </p:sp>
       <p:sp>
         <p:nvSpPr>
-          <p:cNvPr id="44" name="TextBox 43"/>
+          <p:cNvPr id="50" name="TextBox 49"/>
           <p:cNvSpPr txBox="1"/>
           <p:nvPr/>
         </p:nvSpPr>
@@ -10284,7 +10548,51 @@
       </p:sp>
       <p:sp>
         <p:nvSpPr>
-          <p:cNvPr id="11" name="TextBox 10"/>
+          <p:cNvPr id="11" name="Rectangle 10"/>
+          <p:cNvSpPr/>
+          <p:nvPr/>
+        </p:nvSpPr>
+        <p:spPr>
+          <a:xfrm>
+            <a:off x="2315489" y="3346132"/>
+            <a:ext cx="77152" cy="77152"/>
+          </a:xfrm>
+          <a:prstGeom prst="rect">
+            <a:avLst/>
+          </a:prstGeom>
+          <a:solidFill>
+            <a:srgbClr val="00FF9C"/>
+          </a:solidFill>
+          <a:ln>
+            <a:noFill/>
+          </a:ln>
+          <a:effectLst/>
+        </p:spPr>
+        <p:style>
+          <a:lnRef idx="1">
+            <a:schemeClr val="accent1"/>
+          </a:lnRef>
+          <a:fillRef idx="3">
+            <a:schemeClr val="accent1"/>
+          </a:fillRef>
+          <a:effectRef idx="2">
+            <a:schemeClr val="accent1"/>
+          </a:effectRef>
+          <a:fontRef idx="minor">
+            <a:schemeClr val="lt1"/>
+          </a:fontRef>
+        </p:style>
+        <p:txBody>
+          <a:bodyPr rtlCol="0" anchor="ctr"/>
+          <a:lstStyle/>
+          <a:p>
+            <a:pPr algn="ctr"/>
+          </a:p>
+        </p:txBody>
+      </p:sp>
+      <p:sp>
+        <p:nvSpPr>
+          <p:cNvPr id="12" name="TextBox 11"/>
           <p:cNvSpPr txBox="1"/>
           <p:nvPr/>
         </p:nvSpPr>
@@ -10323,7 +10631,7 @@
       </p:sp>
       <p:sp>
         <p:nvSpPr>
-          <p:cNvPr id="12" name="TextBox 11"/>
+          <p:cNvPr id="13" name="TextBox 12"/>
           <p:cNvSpPr txBox="1"/>
           <p:nvPr/>
         </p:nvSpPr>
@@ -10362,7 +10670,7 @@
       </p:sp>
       <p:sp>
         <p:nvSpPr>
-          <p:cNvPr id="13" name="Rectangle 12"/>
+          <p:cNvPr id="14" name="Rectangle 13"/>
           <p:cNvSpPr/>
           <p:nvPr/>
         </p:nvSpPr>
@@ -10406,7 +10714,7 @@
       </p:sp>
       <p:sp>
         <p:nvSpPr>
-          <p:cNvPr id="14" name="Rectangle 13"/>
+          <p:cNvPr id="15" name="Rectangle 14"/>
           <p:cNvSpPr/>
           <p:nvPr/>
         </p:nvSpPr>
@@ -10452,7 +10760,7 @@
       </p:sp>
       <p:sp>
         <p:nvSpPr>
-          <p:cNvPr id="15" name="Oval 14"/>
+          <p:cNvPr id="16" name="Oval 15"/>
           <p:cNvSpPr/>
           <p:nvPr/>
         </p:nvSpPr>
@@ -10496,7 +10804,7 @@
       </p:sp>
       <p:sp>
         <p:nvSpPr>
-          <p:cNvPr id="16" name="Freeform 15"/>
+          <p:cNvPr id="17" name="Freeform 16"/>
           <p:cNvSpPr/>
           <p:nvPr/>
         </p:nvSpPr>
@@ -10563,7 +10871,51 @@
       </p:sp>
       <p:sp>
         <p:nvSpPr>
-          <p:cNvPr id="17" name="TextBox 16"/>
+          <p:cNvPr id="18" name="Rectangle 17"/>
+          <p:cNvSpPr/>
+          <p:nvPr/>
+        </p:nvSpPr>
+        <p:spPr>
+          <a:xfrm>
+            <a:off x="5054803" y="3346132"/>
+            <a:ext cx="77152" cy="77152"/>
+          </a:xfrm>
+          <a:prstGeom prst="rect">
+            <a:avLst/>
+          </a:prstGeom>
+          <a:solidFill>
+            <a:srgbClr val="00FF9C"/>
+          </a:solidFill>
+          <a:ln>
+            <a:noFill/>
+          </a:ln>
+          <a:effectLst/>
+        </p:spPr>
+        <p:style>
+          <a:lnRef idx="1">
+            <a:schemeClr val="accent1"/>
+          </a:lnRef>
+          <a:fillRef idx="3">
+            <a:schemeClr val="accent1"/>
+          </a:fillRef>
+          <a:effectRef idx="2">
+            <a:schemeClr val="accent1"/>
+          </a:effectRef>
+          <a:fontRef idx="minor">
+            <a:schemeClr val="lt1"/>
+          </a:fontRef>
+        </p:style>
+        <p:txBody>
+          <a:bodyPr rtlCol="0" anchor="ctr"/>
+          <a:lstStyle/>
+          <a:p>
+            <a:pPr algn="ctr"/>
+          </a:p>
+        </p:txBody>
+      </p:sp>
+      <p:sp>
+        <p:nvSpPr>
+          <p:cNvPr id="19" name="TextBox 18"/>
           <p:cNvSpPr txBox="1"/>
           <p:nvPr/>
         </p:nvSpPr>
@@ -10602,7 +10954,7 @@
       </p:sp>
       <p:sp>
         <p:nvSpPr>
-          <p:cNvPr id="18" name="TextBox 17"/>
+          <p:cNvPr id="20" name="TextBox 19"/>
           <p:cNvSpPr txBox="1"/>
           <p:nvPr/>
         </p:nvSpPr>
@@ -10641,7 +10993,7 @@
       </p:sp>
       <p:sp>
         <p:nvSpPr>
-          <p:cNvPr id="19" name="Rectangle 18"/>
+          <p:cNvPr id="21" name="Rectangle 20"/>
           <p:cNvSpPr/>
           <p:nvPr/>
         </p:nvSpPr>
@@ -10685,7 +11037,7 @@
       </p:sp>
       <p:sp>
         <p:nvSpPr>
-          <p:cNvPr id="20" name="Rectangle 19"/>
+          <p:cNvPr id="22" name="Rectangle 21"/>
           <p:cNvSpPr/>
           <p:nvPr/>
         </p:nvSpPr>
@@ -10731,7 +11083,7 @@
       </p:sp>
       <p:sp>
         <p:nvSpPr>
-          <p:cNvPr id="21" name="Oval 20"/>
+          <p:cNvPr id="23" name="Oval 22"/>
           <p:cNvSpPr/>
           <p:nvPr/>
         </p:nvSpPr>
@@ -10775,7 +11127,7 @@
       </p:sp>
       <p:sp>
         <p:nvSpPr>
-          <p:cNvPr id="22" name="Freeform 21"/>
+          <p:cNvPr id="24" name="Freeform 23"/>
           <p:cNvSpPr/>
           <p:nvPr/>
         </p:nvSpPr>
@@ -10842,7 +11194,51 @@
       </p:sp>
       <p:sp>
         <p:nvSpPr>
-          <p:cNvPr id="23" name="TextBox 22"/>
+          <p:cNvPr id="25" name="Rectangle 24"/>
+          <p:cNvSpPr/>
+          <p:nvPr/>
+        </p:nvSpPr>
+        <p:spPr>
+          <a:xfrm>
+            <a:off x="7794117" y="3346132"/>
+            <a:ext cx="77152" cy="77152"/>
+          </a:xfrm>
+          <a:prstGeom prst="rect">
+            <a:avLst/>
+          </a:prstGeom>
+          <a:solidFill>
+            <a:srgbClr val="00FF9C"/>
+          </a:solidFill>
+          <a:ln>
+            <a:noFill/>
+          </a:ln>
+          <a:effectLst/>
+        </p:spPr>
+        <p:style>
+          <a:lnRef idx="1">
+            <a:schemeClr val="accent1"/>
+          </a:lnRef>
+          <a:fillRef idx="3">
+            <a:schemeClr val="accent1"/>
+          </a:fillRef>
+          <a:effectRef idx="2">
+            <a:schemeClr val="accent1"/>
+          </a:effectRef>
+          <a:fontRef idx="minor">
+            <a:schemeClr val="lt1"/>
+          </a:fontRef>
+        </p:style>
+        <p:txBody>
+          <a:bodyPr rtlCol="0" anchor="ctr"/>
+          <a:lstStyle/>
+          <a:p>
+            <a:pPr algn="ctr"/>
+          </a:p>
+        </p:txBody>
+      </p:sp>
+      <p:sp>
+        <p:nvSpPr>
+          <p:cNvPr id="26" name="TextBox 25"/>
           <p:cNvSpPr txBox="1"/>
           <p:nvPr/>
         </p:nvSpPr>
@@ -10881,7 +11277,7 @@
       </p:sp>
       <p:sp>
         <p:nvSpPr>
-          <p:cNvPr id="24" name="TextBox 23"/>
+          <p:cNvPr id="27" name="TextBox 26"/>
           <p:cNvSpPr txBox="1"/>
           <p:nvPr/>
         </p:nvSpPr>
@@ -10920,7 +11316,7 @@
       </p:sp>
       <p:sp>
         <p:nvSpPr>
-          <p:cNvPr id="25" name="Rectangle 24"/>
+          <p:cNvPr id="28" name="Rectangle 27"/>
           <p:cNvSpPr/>
           <p:nvPr/>
         </p:nvSpPr>
@@ -10964,7 +11360,7 @@
       </p:sp>
       <p:sp>
         <p:nvSpPr>
-          <p:cNvPr id="26" name="Rectangle 25"/>
+          <p:cNvPr id="29" name="Rectangle 28"/>
           <p:cNvSpPr/>
           <p:nvPr/>
         </p:nvSpPr>
@@ -11010,7 +11406,7 @@
       </p:sp>
       <p:sp>
         <p:nvSpPr>
-          <p:cNvPr id="27" name="Oval 26"/>
+          <p:cNvPr id="30" name="Oval 29"/>
           <p:cNvSpPr/>
           <p:nvPr/>
         </p:nvSpPr>
@@ -11054,7 +11450,7 @@
       </p:sp>
       <p:sp>
         <p:nvSpPr>
-          <p:cNvPr id="28" name="Freeform 27"/>
+          <p:cNvPr id="31" name="Freeform 30"/>
           <p:cNvSpPr/>
           <p:nvPr/>
         </p:nvSpPr>
@@ -11121,7 +11517,51 @@
       </p:sp>
       <p:sp>
         <p:nvSpPr>
-          <p:cNvPr id="29" name="TextBox 28"/>
+          <p:cNvPr id="32" name="Rectangle 31"/>
+          <p:cNvSpPr/>
+          <p:nvPr/>
+        </p:nvSpPr>
+        <p:spPr>
+          <a:xfrm>
+            <a:off x="10533431" y="3346132"/>
+            <a:ext cx="77152" cy="77152"/>
+          </a:xfrm>
+          <a:prstGeom prst="rect">
+            <a:avLst/>
+          </a:prstGeom>
+          <a:solidFill>
+            <a:srgbClr val="00FF9C"/>
+          </a:solidFill>
+          <a:ln>
+            <a:noFill/>
+          </a:ln>
+          <a:effectLst/>
+        </p:spPr>
+        <p:style>
+          <a:lnRef idx="1">
+            <a:schemeClr val="accent1"/>
+          </a:lnRef>
+          <a:fillRef idx="3">
+            <a:schemeClr val="accent1"/>
+          </a:fillRef>
+          <a:effectRef idx="2">
+            <a:schemeClr val="accent1"/>
+          </a:effectRef>
+          <a:fontRef idx="minor">
+            <a:schemeClr val="lt1"/>
+          </a:fontRef>
+        </p:style>
+        <p:txBody>
+          <a:bodyPr rtlCol="0" anchor="ctr"/>
+          <a:lstStyle/>
+          <a:p>
+            <a:pPr algn="ctr"/>
+          </a:p>
+        </p:txBody>
+      </p:sp>
+      <p:sp>
+        <p:nvSpPr>
+          <p:cNvPr id="33" name="TextBox 32"/>
           <p:cNvSpPr txBox="1"/>
           <p:nvPr/>
         </p:nvSpPr>
@@ -11160,7 +11600,7 @@
       </p:sp>
       <p:sp>
         <p:nvSpPr>
-          <p:cNvPr id="30" name="TextBox 29"/>
+          <p:cNvPr id="34" name="TextBox 33"/>
           <p:cNvSpPr txBox="1"/>
           <p:nvPr/>
         </p:nvSpPr>
@@ -11199,7 +11639,7 @@
       </p:sp>
       <p:sp>
         <p:nvSpPr>
-          <p:cNvPr id="31" name="Rectangle 30"/>
+          <p:cNvPr id="35" name="Rectangle 34"/>
           <p:cNvSpPr/>
           <p:nvPr/>
         </p:nvSpPr>
@@ -11243,7 +11683,7 @@
       </p:sp>
       <p:sp>
         <p:nvSpPr>
-          <p:cNvPr id="32" name="TextBox 31"/>
+          <p:cNvPr id="36" name="TextBox 35"/>
           <p:cNvSpPr txBox="1"/>
           <p:nvPr/>
         </p:nvSpPr>
@@ -11286,7 +11726,7 @@
       </p:sp>
       <p:sp>
         <p:nvSpPr>
-          <p:cNvPr id="33" name="TextBox 32"/>
+          <p:cNvPr id="37" name="TextBox 36"/>
           <p:cNvSpPr txBox="1"/>
           <p:nvPr/>
         </p:nvSpPr>
@@ -17021,7 +17461,7 @@
         </p:nvSpPr>
         <p:spPr>
           <a:xfrm>
-            <a:off x="1211580" y="2811780"/>
+            <a:off x="1177290" y="2777490"/>
             <a:ext cx="205740" cy="205740"/>
           </a:xfrm>
           <a:prstGeom prst="rect">
@@ -17065,7 +17505,7 @@
         </p:nvSpPr>
         <p:spPr>
           <a:xfrm>
-            <a:off x="1508760" y="2811780"/>
+            <a:off x="1474470" y="2777490"/>
             <a:ext cx="205740" cy="205740"/>
           </a:xfrm>
           <a:prstGeom prst="rect">
@@ -17109,7 +17549,7 @@
         </p:nvSpPr>
         <p:spPr>
           <a:xfrm>
-            <a:off x="1211580" y="3108960"/>
+            <a:off x="1177290" y="3074670"/>
             <a:ext cx="205740" cy="205740"/>
           </a:xfrm>
           <a:prstGeom prst="rect">
@@ -17153,7 +17593,7 @@
         </p:nvSpPr>
         <p:spPr>
           <a:xfrm>
-            <a:off x="1508760" y="3108960"/>
+            <a:off x="1474470" y="3074670"/>
             <a:ext cx="205740" cy="205740"/>
           </a:xfrm>
           <a:prstGeom prst="rect">
@@ -17191,7 +17631,51 @@
       </p:sp>
       <p:sp>
         <p:nvSpPr>
-          <p:cNvPr id="13" name="TextBox 12"/>
+          <p:cNvPr id="13" name="Rectangle 12"/>
+          <p:cNvSpPr/>
+          <p:nvPr/>
+        </p:nvSpPr>
+        <p:spPr>
+          <a:xfrm>
+            <a:off x="1714500" y="3314700"/>
+            <a:ext cx="68580" cy="68580"/>
+          </a:xfrm>
+          <a:prstGeom prst="rect">
+            <a:avLst/>
+          </a:prstGeom>
+          <a:solidFill>
+            <a:srgbClr val="00FF9C"/>
+          </a:solidFill>
+          <a:ln>
+            <a:noFill/>
+          </a:ln>
+          <a:effectLst/>
+        </p:spPr>
+        <p:style>
+          <a:lnRef idx="1">
+            <a:schemeClr val="accent1"/>
+          </a:lnRef>
+          <a:fillRef idx="3">
+            <a:schemeClr val="accent1"/>
+          </a:fillRef>
+          <a:effectRef idx="2">
+            <a:schemeClr val="accent1"/>
+          </a:effectRef>
+          <a:fontRef idx="minor">
+            <a:schemeClr val="lt1"/>
+          </a:fontRef>
+        </p:style>
+        <p:txBody>
+          <a:bodyPr rtlCol="0" anchor="ctr"/>
+          <a:lstStyle/>
+          <a:p>
+            <a:pPr algn="ctr"/>
+          </a:p>
+        </p:txBody>
+      </p:sp>
+      <p:sp>
+        <p:nvSpPr>
+          <p:cNvPr id="14" name="TextBox 13"/>
           <p:cNvSpPr txBox="1"/>
           <p:nvPr/>
         </p:nvSpPr>
@@ -17230,7 +17714,7 @@
       </p:sp>
       <p:sp>
         <p:nvSpPr>
-          <p:cNvPr id="14" name="TextBox 13"/>
+          <p:cNvPr id="15" name="TextBox 14"/>
           <p:cNvSpPr txBox="1"/>
           <p:nvPr/>
         </p:nvSpPr>
@@ -17269,7 +17753,7 @@
       </p:sp>
       <p:sp>
         <p:nvSpPr>
-          <p:cNvPr id="15" name="Rectangle 14"/>
+          <p:cNvPr id="16" name="Rectangle 15"/>
           <p:cNvSpPr/>
           <p:nvPr/>
         </p:nvSpPr>
@@ -17313,7 +17797,7 @@
       </p:sp>
       <p:sp>
         <p:nvSpPr>
-          <p:cNvPr id="16" name="Rectangle 15"/>
+          <p:cNvPr id="17" name="Rectangle 16"/>
           <p:cNvSpPr/>
           <p:nvPr/>
         </p:nvSpPr>
@@ -17359,7 +17843,7 @@
       </p:sp>
       <p:sp>
         <p:nvSpPr>
-          <p:cNvPr id="17" name="Freeform 16"/>
+          <p:cNvPr id="18" name="Freeform 17"/>
           <p:cNvSpPr/>
           <p:nvPr/>
         </p:nvSpPr>
@@ -17420,7 +17904,7 @@
       </p:sp>
       <p:sp>
         <p:nvSpPr>
-          <p:cNvPr id="18" name="Freeform 17"/>
+          <p:cNvPr id="19" name="Freeform 18"/>
           <p:cNvSpPr/>
           <p:nvPr/>
         </p:nvSpPr>
@@ -17481,7 +17965,7 @@
       </p:sp>
       <p:cxnSp>
         <p:nvCxnSpPr>
-          <p:cNvPr id="19" name="Connector 18"/>
+          <p:cNvPr id="20" name="Connector 19"/>
           <p:cNvCxnSpPr/>
           <p:nvPr/>
         </p:nvCxnSpPr>
@@ -17517,7 +18001,51 @@
       </p:cxnSp>
       <p:sp>
         <p:nvSpPr>
-          <p:cNvPr id="20" name="TextBox 19"/>
+          <p:cNvPr id="21" name="Rectangle 20"/>
+          <p:cNvSpPr/>
+          <p:nvPr/>
+        </p:nvSpPr>
+        <p:spPr>
+          <a:xfrm>
+            <a:off x="5412638" y="3314700"/>
+            <a:ext cx="68580" cy="68580"/>
+          </a:xfrm>
+          <a:prstGeom prst="rect">
+            <a:avLst/>
+          </a:prstGeom>
+          <a:solidFill>
+            <a:srgbClr val="00FF9C"/>
+          </a:solidFill>
+          <a:ln>
+            <a:noFill/>
+          </a:ln>
+          <a:effectLst/>
+        </p:spPr>
+        <p:style>
+          <a:lnRef idx="1">
+            <a:schemeClr val="accent1"/>
+          </a:lnRef>
+          <a:fillRef idx="3">
+            <a:schemeClr val="accent1"/>
+          </a:fillRef>
+          <a:effectRef idx="2">
+            <a:schemeClr val="accent1"/>
+          </a:effectRef>
+          <a:fontRef idx="minor">
+            <a:schemeClr val="lt1"/>
+          </a:fontRef>
+        </p:style>
+        <p:txBody>
+          <a:bodyPr rtlCol="0" anchor="ctr"/>
+          <a:lstStyle/>
+          <a:p>
+            <a:pPr algn="ctr"/>
+          </a:p>
+        </p:txBody>
+      </p:sp>
+      <p:sp>
+        <p:nvSpPr>
+          <p:cNvPr id="22" name="TextBox 21"/>
           <p:cNvSpPr txBox="1"/>
           <p:nvPr/>
         </p:nvSpPr>
@@ -17556,7 +18084,7 @@
       </p:sp>
       <p:sp>
         <p:nvSpPr>
-          <p:cNvPr id="21" name="TextBox 20"/>
+          <p:cNvPr id="23" name="TextBox 22"/>
           <p:cNvSpPr txBox="1"/>
           <p:nvPr/>
         </p:nvSpPr>
@@ -17595,7 +18123,7 @@
       </p:sp>
       <p:sp>
         <p:nvSpPr>
-          <p:cNvPr id="22" name="Rectangle 21"/>
+          <p:cNvPr id="24" name="Rectangle 23"/>
           <p:cNvSpPr/>
           <p:nvPr/>
         </p:nvSpPr>
@@ -17639,7 +18167,7 @@
       </p:sp>
       <p:sp>
         <p:nvSpPr>
-          <p:cNvPr id="23" name="Rectangle 22"/>
+          <p:cNvPr id="25" name="Rectangle 24"/>
           <p:cNvSpPr/>
           <p:nvPr/>
         </p:nvSpPr>
@@ -17685,7 +18213,7 @@
       </p:sp>
       <p:sp>
         <p:nvSpPr>
-          <p:cNvPr id="24" name="Freeform 23"/>
+          <p:cNvPr id="26" name="Freeform 25"/>
           <p:cNvSpPr/>
           <p:nvPr/>
         </p:nvSpPr>
@@ -17764,7 +18292,51 @@
       </p:sp>
       <p:sp>
         <p:nvSpPr>
-          <p:cNvPr id="25" name="TextBox 24"/>
+          <p:cNvPr id="27" name="Rectangle 26"/>
+          <p:cNvSpPr/>
+          <p:nvPr/>
+        </p:nvSpPr>
+        <p:spPr>
+          <a:xfrm>
+            <a:off x="9110777" y="3314700"/>
+            <a:ext cx="68580" cy="68580"/>
+          </a:xfrm>
+          <a:prstGeom prst="rect">
+            <a:avLst/>
+          </a:prstGeom>
+          <a:solidFill>
+            <a:srgbClr val="00FF9C"/>
+          </a:solidFill>
+          <a:ln>
+            <a:noFill/>
+          </a:ln>
+          <a:effectLst/>
+        </p:spPr>
+        <p:style>
+          <a:lnRef idx="1">
+            <a:schemeClr val="accent1"/>
+          </a:lnRef>
+          <a:fillRef idx="3">
+            <a:schemeClr val="accent1"/>
+          </a:fillRef>
+          <a:effectRef idx="2">
+            <a:schemeClr val="accent1"/>
+          </a:effectRef>
+          <a:fontRef idx="minor">
+            <a:schemeClr val="lt1"/>
+          </a:fontRef>
+        </p:style>
+        <p:txBody>
+          <a:bodyPr rtlCol="0" anchor="ctr"/>
+          <a:lstStyle/>
+          <a:p>
+            <a:pPr algn="ctr"/>
+          </a:p>
+        </p:txBody>
+      </p:sp>
+      <p:sp>
+        <p:nvSpPr>
+          <p:cNvPr id="28" name="TextBox 27"/>
           <p:cNvSpPr txBox="1"/>
           <p:nvPr/>
         </p:nvSpPr>
@@ -17803,7 +18375,7 @@
       </p:sp>
       <p:sp>
         <p:nvSpPr>
-          <p:cNvPr id="26" name="TextBox 25"/>
+          <p:cNvPr id="29" name="TextBox 28"/>
           <p:cNvSpPr txBox="1"/>
           <p:nvPr/>
         </p:nvSpPr>
@@ -17842,7 +18414,7 @@
       </p:sp>
       <p:sp>
         <p:nvSpPr>
-          <p:cNvPr id="27" name="Rectangle 26"/>
+          <p:cNvPr id="30" name="Rectangle 29"/>
           <p:cNvSpPr/>
           <p:nvPr/>
         </p:nvSpPr>
@@ -17886,7 +18458,7 @@
       </p:sp>
       <p:sp>
         <p:nvSpPr>
-          <p:cNvPr id="28" name="TextBox 27"/>
+          <p:cNvPr id="31" name="TextBox 30"/>
           <p:cNvSpPr txBox="1"/>
           <p:nvPr/>
         </p:nvSpPr>
@@ -17929,7 +18501,7 @@
       </p:sp>
       <p:sp>
         <p:nvSpPr>
-          <p:cNvPr id="29" name="TextBox 28"/>
+          <p:cNvPr id="32" name="TextBox 31"/>
           <p:cNvSpPr txBox="1"/>
           <p:nvPr/>
         </p:nvSpPr>

--- a/templates/google-slides/nozilla-slides-master.pptx
+++ b/templates/google-slides/nozilla-slides-master.pptx
@@ -8307,7 +8307,51 @@
       </p:sp>
       <p:sp>
         <p:nvSpPr>
-          <p:cNvPr id="8" name="TextBox 7"/>
+          <p:cNvPr id="8" name="Rectangle 7"/>
+          <p:cNvSpPr/>
+          <p:nvPr/>
+        </p:nvSpPr>
+        <p:spPr>
+          <a:xfrm>
+            <a:off x="1355884" y="2956084"/>
+            <a:ext cx="64294" cy="64294"/>
+          </a:xfrm>
+          <a:prstGeom prst="rect">
+            <a:avLst/>
+          </a:prstGeom>
+          <a:solidFill>
+            <a:srgbClr val="00FF9C"/>
+          </a:solidFill>
+          <a:ln>
+            <a:noFill/>
+          </a:ln>
+          <a:effectLst/>
+        </p:spPr>
+        <p:style>
+          <a:lnRef idx="1">
+            <a:schemeClr val="accent1"/>
+          </a:lnRef>
+          <a:fillRef idx="3">
+            <a:schemeClr val="accent1"/>
+          </a:fillRef>
+          <a:effectRef idx="2">
+            <a:schemeClr val="accent1"/>
+          </a:effectRef>
+          <a:fontRef idx="minor">
+            <a:schemeClr val="lt1"/>
+          </a:fontRef>
+        </p:style>
+        <p:txBody>
+          <a:bodyPr rtlCol="0" anchor="ctr"/>
+          <a:lstStyle/>
+          <a:p>
+            <a:pPr algn="ctr"/>
+          </a:p>
+        </p:txBody>
+      </p:sp>
+      <p:sp>
+        <p:nvSpPr>
+          <p:cNvPr id="9" name="TextBox 8"/>
           <p:cNvSpPr txBox="1"/>
           <p:nvPr/>
         </p:nvSpPr>
@@ -8346,7 +8390,7 @@
       </p:sp>
       <p:sp>
         <p:nvSpPr>
-          <p:cNvPr id="9" name="TextBox 8"/>
+          <p:cNvPr id="10" name="TextBox 9"/>
           <p:cNvSpPr txBox="1"/>
           <p:nvPr/>
         </p:nvSpPr>
@@ -8385,7 +8429,7 @@
       </p:sp>
       <p:sp>
         <p:nvSpPr>
-          <p:cNvPr id="10" name="Rectangle 9"/>
+          <p:cNvPr id="11" name="Rectangle 10"/>
           <p:cNvSpPr/>
           <p:nvPr/>
         </p:nvSpPr>
@@ -8429,7 +8473,7 @@
       </p:sp>
       <p:cxnSp>
         <p:nvCxnSpPr>
-          <p:cNvPr id="11" name="Connector 10"/>
+          <p:cNvPr id="12" name="Connector 11"/>
           <p:cNvCxnSpPr/>
           <p:nvPr/>
         </p:nvCxnSpPr>
@@ -8465,7 +8509,7 @@
       </p:cxnSp>
       <p:sp>
         <p:nvSpPr>
-          <p:cNvPr id="12" name="Freeform 11"/>
+          <p:cNvPr id="13" name="Freeform 12"/>
           <p:cNvSpPr/>
           <p:nvPr/>
         </p:nvSpPr>
@@ -8526,7 +8570,7 @@
       </p:sp>
       <p:cxnSp>
         <p:nvCxnSpPr>
-          <p:cNvPr id="13" name="Connector 12"/>
+          <p:cNvPr id="14" name="Connector 13"/>
           <p:cNvCxnSpPr/>
           <p:nvPr/>
         </p:nvCxnSpPr>
@@ -8562,7 +8606,51 @@
       </p:cxnSp>
       <p:sp>
         <p:nvSpPr>
-          <p:cNvPr id="14" name="TextBox 13"/>
+          <p:cNvPr id="15" name="Rectangle 14"/>
+          <p:cNvSpPr/>
+          <p:nvPr/>
+        </p:nvSpPr>
+        <p:spPr>
+          <a:xfrm>
+            <a:off x="5054022" y="2956084"/>
+            <a:ext cx="64294" cy="64294"/>
+          </a:xfrm>
+          <a:prstGeom prst="rect">
+            <a:avLst/>
+          </a:prstGeom>
+          <a:solidFill>
+            <a:srgbClr val="00FF9C"/>
+          </a:solidFill>
+          <a:ln>
+            <a:noFill/>
+          </a:ln>
+          <a:effectLst/>
+        </p:spPr>
+        <p:style>
+          <a:lnRef idx="1">
+            <a:schemeClr val="accent1"/>
+          </a:lnRef>
+          <a:fillRef idx="3">
+            <a:schemeClr val="accent1"/>
+          </a:fillRef>
+          <a:effectRef idx="2">
+            <a:schemeClr val="accent1"/>
+          </a:effectRef>
+          <a:fontRef idx="minor">
+            <a:schemeClr val="lt1"/>
+          </a:fontRef>
+        </p:style>
+        <p:txBody>
+          <a:bodyPr rtlCol="0" anchor="ctr"/>
+          <a:lstStyle/>
+          <a:p>
+            <a:pPr algn="ctr"/>
+          </a:p>
+        </p:txBody>
+      </p:sp>
+      <p:sp>
+        <p:nvSpPr>
+          <p:cNvPr id="16" name="TextBox 15"/>
           <p:cNvSpPr txBox="1"/>
           <p:nvPr/>
         </p:nvSpPr>
@@ -8601,7 +8689,7 @@
       </p:sp>
       <p:sp>
         <p:nvSpPr>
-          <p:cNvPr id="15" name="TextBox 14"/>
+          <p:cNvPr id="17" name="TextBox 16"/>
           <p:cNvSpPr txBox="1"/>
           <p:nvPr/>
         </p:nvSpPr>
@@ -8640,7 +8728,7 @@
       </p:sp>
       <p:sp>
         <p:nvSpPr>
-          <p:cNvPr id="16" name="Freeform 15"/>
+          <p:cNvPr id="18" name="Freeform 17"/>
           <p:cNvSpPr/>
           <p:nvPr/>
         </p:nvSpPr>
@@ -8722,7 +8810,51 @@
       </p:sp>
       <p:sp>
         <p:nvSpPr>
-          <p:cNvPr id="17" name="TextBox 16"/>
+          <p:cNvPr id="19" name="Rectangle 18"/>
+          <p:cNvSpPr/>
+          <p:nvPr/>
+        </p:nvSpPr>
+        <p:spPr>
+          <a:xfrm>
+            <a:off x="8752161" y="2956084"/>
+            <a:ext cx="64294" cy="64294"/>
+          </a:xfrm>
+          <a:prstGeom prst="rect">
+            <a:avLst/>
+          </a:prstGeom>
+          <a:solidFill>
+            <a:srgbClr val="00FF9C"/>
+          </a:solidFill>
+          <a:ln>
+            <a:noFill/>
+          </a:ln>
+          <a:effectLst/>
+        </p:spPr>
+        <p:style>
+          <a:lnRef idx="1">
+            <a:schemeClr val="accent1"/>
+          </a:lnRef>
+          <a:fillRef idx="3">
+            <a:schemeClr val="accent1"/>
+          </a:fillRef>
+          <a:effectRef idx="2">
+            <a:schemeClr val="accent1"/>
+          </a:effectRef>
+          <a:fontRef idx="minor">
+            <a:schemeClr val="lt1"/>
+          </a:fontRef>
+        </p:style>
+        <p:txBody>
+          <a:bodyPr rtlCol="0" anchor="ctr"/>
+          <a:lstStyle/>
+          <a:p>
+            <a:pPr algn="ctr"/>
+          </a:p>
+        </p:txBody>
+      </p:sp>
+      <p:sp>
+        <p:nvSpPr>
+          <p:cNvPr id="20" name="TextBox 19"/>
           <p:cNvSpPr txBox="1"/>
           <p:nvPr/>
         </p:nvSpPr>
@@ -8761,7 +8893,7 @@
       </p:sp>
       <p:sp>
         <p:nvSpPr>
-          <p:cNvPr id="18" name="TextBox 17"/>
+          <p:cNvPr id="21" name="TextBox 20"/>
           <p:cNvSpPr txBox="1"/>
           <p:nvPr/>
         </p:nvSpPr>
@@ -8800,7 +8932,7 @@
       </p:sp>
       <p:sp>
         <p:nvSpPr>
-          <p:cNvPr id="19" name="Freeform 18"/>
+          <p:cNvPr id="22" name="Freeform 21"/>
           <p:cNvSpPr/>
           <p:nvPr/>
         </p:nvSpPr>
@@ -8874,7 +9006,7 @@
       </p:sp>
       <p:sp>
         <p:nvSpPr>
-          <p:cNvPr id="20" name="Oval 19"/>
+          <p:cNvPr id="23" name="Oval 22"/>
           <p:cNvSpPr/>
           <p:nvPr/>
         </p:nvSpPr>
@@ -8918,7 +9050,7 @@
       </p:sp>
       <p:sp>
         <p:nvSpPr>
-          <p:cNvPr id="21" name="Oval 20"/>
+          <p:cNvPr id="24" name="Oval 23"/>
           <p:cNvSpPr/>
           <p:nvPr/>
         </p:nvSpPr>
@@ -8962,7 +9094,7 @@
       </p:sp>
       <p:sp>
         <p:nvSpPr>
-          <p:cNvPr id="22" name="Oval 21"/>
+          <p:cNvPr id="25" name="Oval 24"/>
           <p:cNvSpPr/>
           <p:nvPr/>
         </p:nvSpPr>
@@ -9006,7 +9138,51 @@
       </p:sp>
       <p:sp>
         <p:nvSpPr>
-          <p:cNvPr id="23" name="TextBox 22"/>
+          <p:cNvPr id="26" name="Rectangle 25"/>
+          <p:cNvSpPr/>
+          <p:nvPr/>
+        </p:nvSpPr>
+        <p:spPr>
+          <a:xfrm>
+            <a:off x="1355884" y="4556284"/>
+            <a:ext cx="64294" cy="64294"/>
+          </a:xfrm>
+          <a:prstGeom prst="rect">
+            <a:avLst/>
+          </a:prstGeom>
+          <a:solidFill>
+            <a:srgbClr val="00FF9C"/>
+          </a:solidFill>
+          <a:ln>
+            <a:noFill/>
+          </a:ln>
+          <a:effectLst/>
+        </p:spPr>
+        <p:style>
+          <a:lnRef idx="1">
+            <a:schemeClr val="accent1"/>
+          </a:lnRef>
+          <a:fillRef idx="3">
+            <a:schemeClr val="accent1"/>
+          </a:fillRef>
+          <a:effectRef idx="2">
+            <a:schemeClr val="accent1"/>
+          </a:effectRef>
+          <a:fontRef idx="minor">
+            <a:schemeClr val="lt1"/>
+          </a:fontRef>
+        </p:style>
+        <p:txBody>
+          <a:bodyPr rtlCol="0" anchor="ctr"/>
+          <a:lstStyle/>
+          <a:p>
+            <a:pPr algn="ctr"/>
+          </a:p>
+        </p:txBody>
+      </p:sp>
+      <p:sp>
+        <p:nvSpPr>
+          <p:cNvPr id="27" name="TextBox 26"/>
           <p:cNvSpPr txBox="1"/>
           <p:nvPr/>
         </p:nvSpPr>
@@ -9045,7 +9221,7 @@
       </p:sp>
       <p:sp>
         <p:nvSpPr>
-          <p:cNvPr id="24" name="TextBox 23"/>
+          <p:cNvPr id="28" name="TextBox 27"/>
           <p:cNvSpPr txBox="1"/>
           <p:nvPr/>
         </p:nvSpPr>
@@ -9084,7 +9260,7 @@
       </p:sp>
       <p:sp>
         <p:nvSpPr>
-          <p:cNvPr id="25" name="Oval 24"/>
+          <p:cNvPr id="29" name="Oval 28"/>
           <p:cNvSpPr/>
           <p:nvPr/>
         </p:nvSpPr>
@@ -9128,7 +9304,7 @@
       </p:sp>
       <p:sp>
         <p:nvSpPr>
-          <p:cNvPr id="26" name="Oval 25"/>
+          <p:cNvPr id="30" name="Oval 29"/>
           <p:cNvSpPr/>
           <p:nvPr/>
         </p:nvSpPr>
@@ -9172,7 +9348,7 @@
       </p:sp>
       <p:cxnSp>
         <p:nvCxnSpPr>
-          <p:cNvPr id="27" name="Connector 26"/>
+          <p:cNvPr id="31" name="Connector 30"/>
           <p:cNvCxnSpPr/>
           <p:nvPr/>
         </p:nvCxnSpPr>
@@ -9180,150 +9356,6 @@
           <a:xfrm>
             <a:off x="4979013" y="4320540"/>
             <a:ext cx="64294" cy="0"/>
-          </a:xfrm>
-          <a:prstGeom prst="line">
-            <a:avLst/>
-          </a:prstGeom>
-          <a:ln w="42862">
-            <a:solidFill>
-              <a:srgbClr val="000000"/>
-            </a:solidFill>
-          </a:ln>
-          <a:effectLst/>
-        </p:spPr>
-        <p:style>
-          <a:lnRef idx="2">
-            <a:schemeClr val="accent1"/>
-          </a:lnRef>
-          <a:fillRef idx="0">
-            <a:schemeClr val="accent1"/>
-          </a:fillRef>
-          <a:effectRef idx="1">
-            <a:schemeClr val="accent1"/>
-          </a:effectRef>
-          <a:fontRef idx="minor">
-            <a:schemeClr val="tx1"/>
-          </a:fontRef>
-        </p:style>
-      </p:cxnSp>
-      <p:cxnSp>
-        <p:nvCxnSpPr>
-          <p:cNvPr id="28" name="Connector 27"/>
-          <p:cNvCxnSpPr/>
-          <p:nvPr/>
-        </p:nvCxnSpPr>
-        <p:spPr>
-          <a:xfrm>
-            <a:off x="4818278" y="4481274"/>
-            <a:ext cx="0" cy="64294"/>
-          </a:xfrm>
-          <a:prstGeom prst="line">
-            <a:avLst/>
-          </a:prstGeom>
-          <a:ln w="42862">
-            <a:solidFill>
-              <a:srgbClr val="000000"/>
-            </a:solidFill>
-          </a:ln>
-          <a:effectLst/>
-        </p:spPr>
-        <p:style>
-          <a:lnRef idx="2">
-            <a:schemeClr val="accent1"/>
-          </a:lnRef>
-          <a:fillRef idx="0">
-            <a:schemeClr val="accent1"/>
-          </a:fillRef>
-          <a:effectRef idx="1">
-            <a:schemeClr val="accent1"/>
-          </a:effectRef>
-          <a:fontRef idx="minor">
-            <a:schemeClr val="tx1"/>
-          </a:fontRef>
-        </p:style>
-      </p:cxnSp>
-      <p:cxnSp>
-        <p:nvCxnSpPr>
-          <p:cNvPr id="29" name="Connector 28"/>
-          <p:cNvCxnSpPr/>
-          <p:nvPr/>
-        </p:nvCxnSpPr>
-        <p:spPr>
-          <a:xfrm flipH="1">
-            <a:off x="4593250" y="4320540"/>
-            <a:ext cx="64294" cy="0"/>
-          </a:xfrm>
-          <a:prstGeom prst="line">
-            <a:avLst/>
-          </a:prstGeom>
-          <a:ln w="42862">
-            <a:solidFill>
-              <a:srgbClr val="000000"/>
-            </a:solidFill>
-          </a:ln>
-          <a:effectLst/>
-        </p:spPr>
-        <p:style>
-          <a:lnRef idx="2">
-            <a:schemeClr val="accent1"/>
-          </a:lnRef>
-          <a:fillRef idx="0">
-            <a:schemeClr val="accent1"/>
-          </a:fillRef>
-          <a:effectRef idx="1">
-            <a:schemeClr val="accent1"/>
-          </a:effectRef>
-          <a:fontRef idx="minor">
-            <a:schemeClr val="tx1"/>
-          </a:fontRef>
-        </p:style>
-      </p:cxnSp>
-      <p:cxnSp>
-        <p:nvCxnSpPr>
-          <p:cNvPr id="30" name="Connector 29"/>
-          <p:cNvCxnSpPr/>
-          <p:nvPr/>
-        </p:nvCxnSpPr>
-        <p:spPr>
-          <a:xfrm flipV="1">
-            <a:off x="4818278" y="4095512"/>
-            <a:ext cx="0" cy="64294"/>
-          </a:xfrm>
-          <a:prstGeom prst="line">
-            <a:avLst/>
-          </a:prstGeom>
-          <a:ln w="42862">
-            <a:solidFill>
-              <a:srgbClr val="000000"/>
-            </a:solidFill>
-          </a:ln>
-          <a:effectLst/>
-        </p:spPr>
-        <p:style>
-          <a:lnRef idx="2">
-            <a:schemeClr val="accent1"/>
-          </a:lnRef>
-          <a:fillRef idx="0">
-            <a:schemeClr val="accent1"/>
-          </a:fillRef>
-          <a:effectRef idx="1">
-            <a:schemeClr val="accent1"/>
-          </a:effectRef>
-          <a:fontRef idx="minor">
-            <a:schemeClr val="tx1"/>
-          </a:fontRef>
-        </p:style>
-      </p:cxnSp>
-      <p:cxnSp>
-        <p:nvCxnSpPr>
-          <p:cNvPr id="31" name="Connector 30"/>
-          <p:cNvCxnSpPr/>
-          <p:nvPr/>
-        </p:nvCxnSpPr>
-        <p:spPr>
-          <a:xfrm>
-            <a:off x="4931864" y="4434126"/>
-            <a:ext cx="47149" cy="47148"/>
           </a:xfrm>
           <a:prstGeom prst="line">
             <a:avLst/>
@@ -9357,9 +9389,9 @@
           <p:nvPr/>
         </p:nvCxnSpPr>
         <p:spPr>
-          <a:xfrm flipH="1">
-            <a:off x="4657544" y="4434126"/>
-            <a:ext cx="47149" cy="47148"/>
+          <a:xfrm>
+            <a:off x="4818278" y="4481274"/>
+            <a:ext cx="0" cy="64294"/>
           </a:xfrm>
           <a:prstGeom prst="line">
             <a:avLst/>
@@ -9393,9 +9425,9 @@
           <p:nvPr/>
         </p:nvCxnSpPr>
         <p:spPr>
-          <a:xfrm flipH="1" flipV="1">
-            <a:off x="4657544" y="4159806"/>
-            <a:ext cx="47149" cy="47148"/>
+          <a:xfrm flipH="1">
+            <a:off x="4593250" y="4320540"/>
+            <a:ext cx="64294" cy="0"/>
           </a:xfrm>
           <a:prstGeom prst="line">
             <a:avLst/>
@@ -9430,8 +9462,8 @@
         </p:nvCxnSpPr>
         <p:spPr>
           <a:xfrm flipV="1">
-            <a:off x="4931864" y="4159806"/>
-            <a:ext cx="47149" cy="47148"/>
+            <a:off x="4818278" y="4095512"/>
+            <a:ext cx="0" cy="64294"/>
           </a:xfrm>
           <a:prstGeom prst="line">
             <a:avLst/>
@@ -9458,9 +9490,197 @@
           </a:fontRef>
         </p:style>
       </p:cxnSp>
-      <p:sp>
-        <p:nvSpPr>
-          <p:cNvPr id="35" name="TextBox 34"/>
+      <p:cxnSp>
+        <p:nvCxnSpPr>
+          <p:cNvPr id="35" name="Connector 34"/>
+          <p:cNvCxnSpPr/>
+          <p:nvPr/>
+        </p:nvCxnSpPr>
+        <p:spPr>
+          <a:xfrm>
+            <a:off x="4931864" y="4434126"/>
+            <a:ext cx="47149" cy="47148"/>
+          </a:xfrm>
+          <a:prstGeom prst="line">
+            <a:avLst/>
+          </a:prstGeom>
+          <a:ln w="42862">
+            <a:solidFill>
+              <a:srgbClr val="000000"/>
+            </a:solidFill>
+          </a:ln>
+          <a:effectLst/>
+        </p:spPr>
+        <p:style>
+          <a:lnRef idx="2">
+            <a:schemeClr val="accent1"/>
+          </a:lnRef>
+          <a:fillRef idx="0">
+            <a:schemeClr val="accent1"/>
+          </a:fillRef>
+          <a:effectRef idx="1">
+            <a:schemeClr val="accent1"/>
+          </a:effectRef>
+          <a:fontRef idx="minor">
+            <a:schemeClr val="tx1"/>
+          </a:fontRef>
+        </p:style>
+      </p:cxnSp>
+      <p:cxnSp>
+        <p:nvCxnSpPr>
+          <p:cNvPr id="36" name="Connector 35"/>
+          <p:cNvCxnSpPr/>
+          <p:nvPr/>
+        </p:nvCxnSpPr>
+        <p:spPr>
+          <a:xfrm flipH="1">
+            <a:off x="4657544" y="4434126"/>
+            <a:ext cx="47149" cy="47148"/>
+          </a:xfrm>
+          <a:prstGeom prst="line">
+            <a:avLst/>
+          </a:prstGeom>
+          <a:ln w="42862">
+            <a:solidFill>
+              <a:srgbClr val="000000"/>
+            </a:solidFill>
+          </a:ln>
+          <a:effectLst/>
+        </p:spPr>
+        <p:style>
+          <a:lnRef idx="2">
+            <a:schemeClr val="accent1"/>
+          </a:lnRef>
+          <a:fillRef idx="0">
+            <a:schemeClr val="accent1"/>
+          </a:fillRef>
+          <a:effectRef idx="1">
+            <a:schemeClr val="accent1"/>
+          </a:effectRef>
+          <a:fontRef idx="minor">
+            <a:schemeClr val="tx1"/>
+          </a:fontRef>
+        </p:style>
+      </p:cxnSp>
+      <p:cxnSp>
+        <p:nvCxnSpPr>
+          <p:cNvPr id="37" name="Connector 36"/>
+          <p:cNvCxnSpPr/>
+          <p:nvPr/>
+        </p:nvCxnSpPr>
+        <p:spPr>
+          <a:xfrm flipH="1" flipV="1">
+            <a:off x="4657544" y="4159806"/>
+            <a:ext cx="47149" cy="47148"/>
+          </a:xfrm>
+          <a:prstGeom prst="line">
+            <a:avLst/>
+          </a:prstGeom>
+          <a:ln w="42862">
+            <a:solidFill>
+              <a:srgbClr val="000000"/>
+            </a:solidFill>
+          </a:ln>
+          <a:effectLst/>
+        </p:spPr>
+        <p:style>
+          <a:lnRef idx="2">
+            <a:schemeClr val="accent1"/>
+          </a:lnRef>
+          <a:fillRef idx="0">
+            <a:schemeClr val="accent1"/>
+          </a:fillRef>
+          <a:effectRef idx="1">
+            <a:schemeClr val="accent1"/>
+          </a:effectRef>
+          <a:fontRef idx="minor">
+            <a:schemeClr val="tx1"/>
+          </a:fontRef>
+        </p:style>
+      </p:cxnSp>
+      <p:cxnSp>
+        <p:nvCxnSpPr>
+          <p:cNvPr id="38" name="Connector 37"/>
+          <p:cNvCxnSpPr/>
+          <p:nvPr/>
+        </p:nvCxnSpPr>
+        <p:spPr>
+          <a:xfrm flipV="1">
+            <a:off x="4931864" y="4159806"/>
+            <a:ext cx="47149" cy="47148"/>
+          </a:xfrm>
+          <a:prstGeom prst="line">
+            <a:avLst/>
+          </a:prstGeom>
+          <a:ln w="42862">
+            <a:solidFill>
+              <a:srgbClr val="000000"/>
+            </a:solidFill>
+          </a:ln>
+          <a:effectLst/>
+        </p:spPr>
+        <p:style>
+          <a:lnRef idx="2">
+            <a:schemeClr val="accent1"/>
+          </a:lnRef>
+          <a:fillRef idx="0">
+            <a:schemeClr val="accent1"/>
+          </a:fillRef>
+          <a:effectRef idx="1">
+            <a:schemeClr val="accent1"/>
+          </a:effectRef>
+          <a:fontRef idx="minor">
+            <a:schemeClr val="tx1"/>
+          </a:fontRef>
+        </p:style>
+      </p:cxnSp>
+      <p:sp>
+        <p:nvSpPr>
+          <p:cNvPr id="39" name="Rectangle 38"/>
+          <p:cNvSpPr/>
+          <p:nvPr/>
+        </p:nvSpPr>
+        <p:spPr>
+          <a:xfrm>
+            <a:off x="5054022" y="4556284"/>
+            <a:ext cx="64294" cy="64294"/>
+          </a:xfrm>
+          <a:prstGeom prst="rect">
+            <a:avLst/>
+          </a:prstGeom>
+          <a:solidFill>
+            <a:srgbClr val="00FF9C"/>
+          </a:solidFill>
+          <a:ln>
+            <a:noFill/>
+          </a:ln>
+          <a:effectLst/>
+        </p:spPr>
+        <p:style>
+          <a:lnRef idx="1">
+            <a:schemeClr val="accent1"/>
+          </a:lnRef>
+          <a:fillRef idx="3">
+            <a:schemeClr val="accent1"/>
+          </a:fillRef>
+          <a:effectRef idx="2">
+            <a:schemeClr val="accent1"/>
+          </a:effectRef>
+          <a:fontRef idx="minor">
+            <a:schemeClr val="lt1"/>
+          </a:fontRef>
+        </p:style>
+        <p:txBody>
+          <a:bodyPr rtlCol="0" anchor="ctr"/>
+          <a:lstStyle/>
+          <a:p>
+            <a:pPr algn="ctr"/>
+          </a:p>
+        </p:txBody>
+      </p:sp>
+      <p:sp>
+        <p:nvSpPr>
+          <p:cNvPr id="40" name="TextBox 39"/>
           <p:cNvSpPr txBox="1"/>
           <p:nvPr/>
         </p:nvSpPr>
@@ -9499,7 +9719,7 @@
       </p:sp>
       <p:sp>
         <p:nvSpPr>
-          <p:cNvPr id="36" name="TextBox 35"/>
+          <p:cNvPr id="41" name="TextBox 40"/>
           <p:cNvSpPr txBox="1"/>
           <p:nvPr/>
         </p:nvSpPr>
@@ -9538,7 +9758,7 @@
       </p:sp>
       <p:sp>
         <p:nvSpPr>
-          <p:cNvPr id="37" name="Oval 36"/>
+          <p:cNvPr id="42" name="Oval 41"/>
           <p:cNvSpPr/>
           <p:nvPr/>
         </p:nvSpPr>
@@ -9584,7 +9804,7 @@
       </p:sp>
       <p:cxnSp>
         <p:nvCxnSpPr>
-          <p:cNvPr id="38" name="Connector 37"/>
+          <p:cNvPr id="43" name="Connector 42"/>
           <p:cNvCxnSpPr/>
           <p:nvPr/>
         </p:nvCxnSpPr>
@@ -9620,7 +9840,7 @@
       </p:cxnSp>
       <p:cxnSp>
         <p:nvCxnSpPr>
-          <p:cNvPr id="39" name="Connector 38"/>
+          <p:cNvPr id="44" name="Connector 43"/>
           <p:cNvCxnSpPr/>
           <p:nvPr/>
         </p:nvCxnSpPr>
@@ -9656,7 +9876,51 @@
       </p:cxnSp>
       <p:sp>
         <p:nvSpPr>
-          <p:cNvPr id="40" name="TextBox 39"/>
+          <p:cNvPr id="45" name="Rectangle 44"/>
+          <p:cNvSpPr/>
+          <p:nvPr/>
+        </p:nvSpPr>
+        <p:spPr>
+          <a:xfrm>
+            <a:off x="8752161" y="4556284"/>
+            <a:ext cx="64294" cy="64294"/>
+          </a:xfrm>
+          <a:prstGeom prst="rect">
+            <a:avLst/>
+          </a:prstGeom>
+          <a:solidFill>
+            <a:srgbClr val="00FF9C"/>
+          </a:solidFill>
+          <a:ln>
+            <a:noFill/>
+          </a:ln>
+          <a:effectLst/>
+        </p:spPr>
+        <p:style>
+          <a:lnRef idx="1">
+            <a:schemeClr val="accent1"/>
+          </a:lnRef>
+          <a:fillRef idx="3">
+            <a:schemeClr val="accent1"/>
+          </a:fillRef>
+          <a:effectRef idx="2">
+            <a:schemeClr val="accent1"/>
+          </a:effectRef>
+          <a:fontRef idx="minor">
+            <a:schemeClr val="lt1"/>
+          </a:fontRef>
+        </p:style>
+        <p:txBody>
+          <a:bodyPr rtlCol="0" anchor="ctr"/>
+          <a:lstStyle/>
+          <a:p>
+            <a:pPr algn="ctr"/>
+          </a:p>
+        </p:txBody>
+      </p:sp>
+      <p:sp>
+        <p:nvSpPr>
+          <p:cNvPr id="46" name="TextBox 45"/>
           <p:cNvSpPr txBox="1"/>
           <p:nvPr/>
         </p:nvSpPr>
@@ -9695,7 +9959,7 @@
       </p:sp>
       <p:sp>
         <p:nvSpPr>
-          <p:cNvPr id="41" name="TextBox 40"/>
+          <p:cNvPr id="47" name="TextBox 46"/>
           <p:cNvSpPr txBox="1"/>
           <p:nvPr/>
         </p:nvSpPr>
@@ -9734,7 +9998,7 @@
       </p:sp>
       <p:sp>
         <p:nvSpPr>
-          <p:cNvPr id="42" name="Rectangle 41"/>
+          <p:cNvPr id="48" name="Rectangle 47"/>
           <p:cNvSpPr/>
           <p:nvPr/>
         </p:nvSpPr>
@@ -9778,7 +10042,7 @@
       </p:sp>
       <p:sp>
         <p:nvSpPr>
-          <p:cNvPr id="43" name="TextBox 42"/>
+          <p:cNvPr id="49" name="TextBox 48"/>
           <p:cNvSpPr txBox="1"/>
           <p:nvPr/>
         </p:nvSpPr>
@@ -9821,7 +10085,7 @@
       </p:sp>
       <p:sp>
         <p:nvSpPr>
-          <p:cNvPr id="44" name="TextBox 43"/>
+          <p:cNvPr id="50" name="TextBox 49"/>
           <p:cNvSpPr txBox="1"/>
           <p:nvPr/>
         </p:nvSpPr>
@@ -10284,7 +10548,51 @@
       </p:sp>
       <p:sp>
         <p:nvSpPr>
-          <p:cNvPr id="11" name="TextBox 10"/>
+          <p:cNvPr id="11" name="Rectangle 10"/>
+          <p:cNvSpPr/>
+          <p:nvPr/>
+        </p:nvSpPr>
+        <p:spPr>
+          <a:xfrm>
+            <a:off x="2315489" y="3346132"/>
+            <a:ext cx="77152" cy="77152"/>
+          </a:xfrm>
+          <a:prstGeom prst="rect">
+            <a:avLst/>
+          </a:prstGeom>
+          <a:solidFill>
+            <a:srgbClr val="00FF9C"/>
+          </a:solidFill>
+          <a:ln>
+            <a:noFill/>
+          </a:ln>
+          <a:effectLst/>
+        </p:spPr>
+        <p:style>
+          <a:lnRef idx="1">
+            <a:schemeClr val="accent1"/>
+          </a:lnRef>
+          <a:fillRef idx="3">
+            <a:schemeClr val="accent1"/>
+          </a:fillRef>
+          <a:effectRef idx="2">
+            <a:schemeClr val="accent1"/>
+          </a:effectRef>
+          <a:fontRef idx="minor">
+            <a:schemeClr val="lt1"/>
+          </a:fontRef>
+        </p:style>
+        <p:txBody>
+          <a:bodyPr rtlCol="0" anchor="ctr"/>
+          <a:lstStyle/>
+          <a:p>
+            <a:pPr algn="ctr"/>
+          </a:p>
+        </p:txBody>
+      </p:sp>
+      <p:sp>
+        <p:nvSpPr>
+          <p:cNvPr id="12" name="TextBox 11"/>
           <p:cNvSpPr txBox="1"/>
           <p:nvPr/>
         </p:nvSpPr>
@@ -10323,7 +10631,7 @@
       </p:sp>
       <p:sp>
         <p:nvSpPr>
-          <p:cNvPr id="12" name="TextBox 11"/>
+          <p:cNvPr id="13" name="TextBox 12"/>
           <p:cNvSpPr txBox="1"/>
           <p:nvPr/>
         </p:nvSpPr>
@@ -10362,7 +10670,7 @@
       </p:sp>
       <p:sp>
         <p:nvSpPr>
-          <p:cNvPr id="13" name="Rectangle 12"/>
+          <p:cNvPr id="14" name="Rectangle 13"/>
           <p:cNvSpPr/>
           <p:nvPr/>
         </p:nvSpPr>
@@ -10406,7 +10714,7 @@
       </p:sp>
       <p:sp>
         <p:nvSpPr>
-          <p:cNvPr id="14" name="Rectangle 13"/>
+          <p:cNvPr id="15" name="Rectangle 14"/>
           <p:cNvSpPr/>
           <p:nvPr/>
         </p:nvSpPr>
@@ -10452,7 +10760,7 @@
       </p:sp>
       <p:sp>
         <p:nvSpPr>
-          <p:cNvPr id="15" name="Oval 14"/>
+          <p:cNvPr id="16" name="Oval 15"/>
           <p:cNvSpPr/>
           <p:nvPr/>
         </p:nvSpPr>
@@ -10496,7 +10804,7 @@
       </p:sp>
       <p:sp>
         <p:nvSpPr>
-          <p:cNvPr id="16" name="Freeform 15"/>
+          <p:cNvPr id="17" name="Freeform 16"/>
           <p:cNvSpPr/>
           <p:nvPr/>
         </p:nvSpPr>
@@ -10563,7 +10871,51 @@
       </p:sp>
       <p:sp>
         <p:nvSpPr>
-          <p:cNvPr id="17" name="TextBox 16"/>
+          <p:cNvPr id="18" name="Rectangle 17"/>
+          <p:cNvSpPr/>
+          <p:nvPr/>
+        </p:nvSpPr>
+        <p:spPr>
+          <a:xfrm>
+            <a:off x="5054803" y="3346132"/>
+            <a:ext cx="77152" cy="77152"/>
+          </a:xfrm>
+          <a:prstGeom prst="rect">
+            <a:avLst/>
+          </a:prstGeom>
+          <a:solidFill>
+            <a:srgbClr val="00FF9C"/>
+          </a:solidFill>
+          <a:ln>
+            <a:noFill/>
+          </a:ln>
+          <a:effectLst/>
+        </p:spPr>
+        <p:style>
+          <a:lnRef idx="1">
+            <a:schemeClr val="accent1"/>
+          </a:lnRef>
+          <a:fillRef idx="3">
+            <a:schemeClr val="accent1"/>
+          </a:fillRef>
+          <a:effectRef idx="2">
+            <a:schemeClr val="accent1"/>
+          </a:effectRef>
+          <a:fontRef idx="minor">
+            <a:schemeClr val="lt1"/>
+          </a:fontRef>
+        </p:style>
+        <p:txBody>
+          <a:bodyPr rtlCol="0" anchor="ctr"/>
+          <a:lstStyle/>
+          <a:p>
+            <a:pPr algn="ctr"/>
+          </a:p>
+        </p:txBody>
+      </p:sp>
+      <p:sp>
+        <p:nvSpPr>
+          <p:cNvPr id="19" name="TextBox 18"/>
           <p:cNvSpPr txBox="1"/>
           <p:nvPr/>
         </p:nvSpPr>
@@ -10602,7 +10954,7 @@
       </p:sp>
       <p:sp>
         <p:nvSpPr>
-          <p:cNvPr id="18" name="TextBox 17"/>
+          <p:cNvPr id="20" name="TextBox 19"/>
           <p:cNvSpPr txBox="1"/>
           <p:nvPr/>
         </p:nvSpPr>
@@ -10641,7 +10993,7 @@
       </p:sp>
       <p:sp>
         <p:nvSpPr>
-          <p:cNvPr id="19" name="Rectangle 18"/>
+          <p:cNvPr id="21" name="Rectangle 20"/>
           <p:cNvSpPr/>
           <p:nvPr/>
         </p:nvSpPr>
@@ -10685,7 +11037,7 @@
       </p:sp>
       <p:sp>
         <p:nvSpPr>
-          <p:cNvPr id="20" name="Rectangle 19"/>
+          <p:cNvPr id="22" name="Rectangle 21"/>
           <p:cNvSpPr/>
           <p:nvPr/>
         </p:nvSpPr>
@@ -10731,7 +11083,7 @@
       </p:sp>
       <p:sp>
         <p:nvSpPr>
-          <p:cNvPr id="21" name="Oval 20"/>
+          <p:cNvPr id="23" name="Oval 22"/>
           <p:cNvSpPr/>
           <p:nvPr/>
         </p:nvSpPr>
@@ -10775,7 +11127,7 @@
       </p:sp>
       <p:sp>
         <p:nvSpPr>
-          <p:cNvPr id="22" name="Freeform 21"/>
+          <p:cNvPr id="24" name="Freeform 23"/>
           <p:cNvSpPr/>
           <p:nvPr/>
         </p:nvSpPr>
@@ -10842,7 +11194,51 @@
       </p:sp>
       <p:sp>
         <p:nvSpPr>
-          <p:cNvPr id="23" name="TextBox 22"/>
+          <p:cNvPr id="25" name="Rectangle 24"/>
+          <p:cNvSpPr/>
+          <p:nvPr/>
+        </p:nvSpPr>
+        <p:spPr>
+          <a:xfrm>
+            <a:off x="7794117" y="3346132"/>
+            <a:ext cx="77152" cy="77152"/>
+          </a:xfrm>
+          <a:prstGeom prst="rect">
+            <a:avLst/>
+          </a:prstGeom>
+          <a:solidFill>
+            <a:srgbClr val="00FF9C"/>
+          </a:solidFill>
+          <a:ln>
+            <a:noFill/>
+          </a:ln>
+          <a:effectLst/>
+        </p:spPr>
+        <p:style>
+          <a:lnRef idx="1">
+            <a:schemeClr val="accent1"/>
+          </a:lnRef>
+          <a:fillRef idx="3">
+            <a:schemeClr val="accent1"/>
+          </a:fillRef>
+          <a:effectRef idx="2">
+            <a:schemeClr val="accent1"/>
+          </a:effectRef>
+          <a:fontRef idx="minor">
+            <a:schemeClr val="lt1"/>
+          </a:fontRef>
+        </p:style>
+        <p:txBody>
+          <a:bodyPr rtlCol="0" anchor="ctr"/>
+          <a:lstStyle/>
+          <a:p>
+            <a:pPr algn="ctr"/>
+          </a:p>
+        </p:txBody>
+      </p:sp>
+      <p:sp>
+        <p:nvSpPr>
+          <p:cNvPr id="26" name="TextBox 25"/>
           <p:cNvSpPr txBox="1"/>
           <p:nvPr/>
         </p:nvSpPr>
@@ -10881,7 +11277,7 @@
       </p:sp>
       <p:sp>
         <p:nvSpPr>
-          <p:cNvPr id="24" name="TextBox 23"/>
+          <p:cNvPr id="27" name="TextBox 26"/>
           <p:cNvSpPr txBox="1"/>
           <p:nvPr/>
         </p:nvSpPr>
@@ -10920,7 +11316,7 @@
       </p:sp>
       <p:sp>
         <p:nvSpPr>
-          <p:cNvPr id="25" name="Rectangle 24"/>
+          <p:cNvPr id="28" name="Rectangle 27"/>
           <p:cNvSpPr/>
           <p:nvPr/>
         </p:nvSpPr>
@@ -10964,7 +11360,7 @@
       </p:sp>
       <p:sp>
         <p:nvSpPr>
-          <p:cNvPr id="26" name="Rectangle 25"/>
+          <p:cNvPr id="29" name="Rectangle 28"/>
           <p:cNvSpPr/>
           <p:nvPr/>
         </p:nvSpPr>
@@ -11010,7 +11406,7 @@
       </p:sp>
       <p:sp>
         <p:nvSpPr>
-          <p:cNvPr id="27" name="Oval 26"/>
+          <p:cNvPr id="30" name="Oval 29"/>
           <p:cNvSpPr/>
           <p:nvPr/>
         </p:nvSpPr>
@@ -11054,7 +11450,7 @@
       </p:sp>
       <p:sp>
         <p:nvSpPr>
-          <p:cNvPr id="28" name="Freeform 27"/>
+          <p:cNvPr id="31" name="Freeform 30"/>
           <p:cNvSpPr/>
           <p:nvPr/>
         </p:nvSpPr>
@@ -11121,7 +11517,51 @@
       </p:sp>
       <p:sp>
         <p:nvSpPr>
-          <p:cNvPr id="29" name="TextBox 28"/>
+          <p:cNvPr id="32" name="Rectangle 31"/>
+          <p:cNvSpPr/>
+          <p:nvPr/>
+        </p:nvSpPr>
+        <p:spPr>
+          <a:xfrm>
+            <a:off x="10533431" y="3346132"/>
+            <a:ext cx="77152" cy="77152"/>
+          </a:xfrm>
+          <a:prstGeom prst="rect">
+            <a:avLst/>
+          </a:prstGeom>
+          <a:solidFill>
+            <a:srgbClr val="00FF9C"/>
+          </a:solidFill>
+          <a:ln>
+            <a:noFill/>
+          </a:ln>
+          <a:effectLst/>
+        </p:spPr>
+        <p:style>
+          <a:lnRef idx="1">
+            <a:schemeClr val="accent1"/>
+          </a:lnRef>
+          <a:fillRef idx="3">
+            <a:schemeClr val="accent1"/>
+          </a:fillRef>
+          <a:effectRef idx="2">
+            <a:schemeClr val="accent1"/>
+          </a:effectRef>
+          <a:fontRef idx="minor">
+            <a:schemeClr val="lt1"/>
+          </a:fontRef>
+        </p:style>
+        <p:txBody>
+          <a:bodyPr rtlCol="0" anchor="ctr"/>
+          <a:lstStyle/>
+          <a:p>
+            <a:pPr algn="ctr"/>
+          </a:p>
+        </p:txBody>
+      </p:sp>
+      <p:sp>
+        <p:nvSpPr>
+          <p:cNvPr id="33" name="TextBox 32"/>
           <p:cNvSpPr txBox="1"/>
           <p:nvPr/>
         </p:nvSpPr>
@@ -11160,7 +11600,7 @@
       </p:sp>
       <p:sp>
         <p:nvSpPr>
-          <p:cNvPr id="30" name="TextBox 29"/>
+          <p:cNvPr id="34" name="TextBox 33"/>
           <p:cNvSpPr txBox="1"/>
           <p:nvPr/>
         </p:nvSpPr>
@@ -11199,7 +11639,7 @@
       </p:sp>
       <p:sp>
         <p:nvSpPr>
-          <p:cNvPr id="31" name="Rectangle 30"/>
+          <p:cNvPr id="35" name="Rectangle 34"/>
           <p:cNvSpPr/>
           <p:nvPr/>
         </p:nvSpPr>
@@ -11243,7 +11683,7 @@
       </p:sp>
       <p:sp>
         <p:nvSpPr>
-          <p:cNvPr id="32" name="TextBox 31"/>
+          <p:cNvPr id="36" name="TextBox 35"/>
           <p:cNvSpPr txBox="1"/>
           <p:nvPr/>
         </p:nvSpPr>
@@ -11286,7 +11726,7 @@
       </p:sp>
       <p:sp>
         <p:nvSpPr>
-          <p:cNvPr id="33" name="TextBox 32"/>
+          <p:cNvPr id="37" name="TextBox 36"/>
           <p:cNvSpPr txBox="1"/>
           <p:nvPr/>
         </p:nvSpPr>
@@ -17191,7 +17631,51 @@
       </p:sp>
       <p:sp>
         <p:nvSpPr>
-          <p:cNvPr id="13" name="TextBox 12"/>
+          <p:cNvPr id="13" name="Rectangle 12"/>
+          <p:cNvSpPr/>
+          <p:nvPr/>
+        </p:nvSpPr>
+        <p:spPr>
+          <a:xfrm>
+            <a:off x="1714500" y="3314700"/>
+            <a:ext cx="68580" cy="68580"/>
+          </a:xfrm>
+          <a:prstGeom prst="rect">
+            <a:avLst/>
+          </a:prstGeom>
+          <a:solidFill>
+            <a:srgbClr val="00FF9C"/>
+          </a:solidFill>
+          <a:ln>
+            <a:noFill/>
+          </a:ln>
+          <a:effectLst/>
+        </p:spPr>
+        <p:style>
+          <a:lnRef idx="1">
+            <a:schemeClr val="accent1"/>
+          </a:lnRef>
+          <a:fillRef idx="3">
+            <a:schemeClr val="accent1"/>
+          </a:fillRef>
+          <a:effectRef idx="2">
+            <a:schemeClr val="accent1"/>
+          </a:effectRef>
+          <a:fontRef idx="minor">
+            <a:schemeClr val="lt1"/>
+          </a:fontRef>
+        </p:style>
+        <p:txBody>
+          <a:bodyPr rtlCol="0" anchor="ctr"/>
+          <a:lstStyle/>
+          <a:p>
+            <a:pPr algn="ctr"/>
+          </a:p>
+        </p:txBody>
+      </p:sp>
+      <p:sp>
+        <p:nvSpPr>
+          <p:cNvPr id="14" name="TextBox 13"/>
           <p:cNvSpPr txBox="1"/>
           <p:nvPr/>
         </p:nvSpPr>
@@ -17230,7 +17714,7 @@
       </p:sp>
       <p:sp>
         <p:nvSpPr>
-          <p:cNvPr id="14" name="TextBox 13"/>
+          <p:cNvPr id="15" name="TextBox 14"/>
           <p:cNvSpPr txBox="1"/>
           <p:nvPr/>
         </p:nvSpPr>
@@ -17269,7 +17753,7 @@
       </p:sp>
       <p:sp>
         <p:nvSpPr>
-          <p:cNvPr id="15" name="Rectangle 14"/>
+          <p:cNvPr id="16" name="Rectangle 15"/>
           <p:cNvSpPr/>
           <p:nvPr/>
         </p:nvSpPr>
@@ -17313,7 +17797,7 @@
       </p:sp>
       <p:sp>
         <p:nvSpPr>
-          <p:cNvPr id="16" name="Rectangle 15"/>
+          <p:cNvPr id="17" name="Rectangle 16"/>
           <p:cNvSpPr/>
           <p:nvPr/>
         </p:nvSpPr>
@@ -17359,7 +17843,7 @@
       </p:sp>
       <p:sp>
         <p:nvSpPr>
-          <p:cNvPr id="17" name="Freeform 16"/>
+          <p:cNvPr id="18" name="Freeform 17"/>
           <p:cNvSpPr/>
           <p:nvPr/>
         </p:nvSpPr>
@@ -17420,7 +17904,7 @@
       </p:sp>
       <p:sp>
         <p:nvSpPr>
-          <p:cNvPr id="18" name="Freeform 17"/>
+          <p:cNvPr id="19" name="Freeform 18"/>
           <p:cNvSpPr/>
           <p:nvPr/>
         </p:nvSpPr>
@@ -17481,7 +17965,7 @@
       </p:sp>
       <p:cxnSp>
         <p:nvCxnSpPr>
-          <p:cNvPr id="19" name="Connector 18"/>
+          <p:cNvPr id="20" name="Connector 19"/>
           <p:cNvCxnSpPr/>
           <p:nvPr/>
         </p:nvCxnSpPr>
@@ -17517,7 +18001,51 @@
       </p:cxnSp>
       <p:sp>
         <p:nvSpPr>
-          <p:cNvPr id="20" name="TextBox 19"/>
+          <p:cNvPr id="21" name="Rectangle 20"/>
+          <p:cNvSpPr/>
+          <p:nvPr/>
+        </p:nvSpPr>
+        <p:spPr>
+          <a:xfrm>
+            <a:off x="5412638" y="3314700"/>
+            <a:ext cx="68580" cy="68580"/>
+          </a:xfrm>
+          <a:prstGeom prst="rect">
+            <a:avLst/>
+          </a:prstGeom>
+          <a:solidFill>
+            <a:srgbClr val="00FF9C"/>
+          </a:solidFill>
+          <a:ln>
+            <a:noFill/>
+          </a:ln>
+          <a:effectLst/>
+        </p:spPr>
+        <p:style>
+          <a:lnRef idx="1">
+            <a:schemeClr val="accent1"/>
+          </a:lnRef>
+          <a:fillRef idx="3">
+            <a:schemeClr val="accent1"/>
+          </a:fillRef>
+          <a:effectRef idx="2">
+            <a:schemeClr val="accent1"/>
+          </a:effectRef>
+          <a:fontRef idx="minor">
+            <a:schemeClr val="lt1"/>
+          </a:fontRef>
+        </p:style>
+        <p:txBody>
+          <a:bodyPr rtlCol="0" anchor="ctr"/>
+          <a:lstStyle/>
+          <a:p>
+            <a:pPr algn="ctr"/>
+          </a:p>
+        </p:txBody>
+      </p:sp>
+      <p:sp>
+        <p:nvSpPr>
+          <p:cNvPr id="22" name="TextBox 21"/>
           <p:cNvSpPr txBox="1"/>
           <p:nvPr/>
         </p:nvSpPr>
@@ -17556,7 +18084,7 @@
       </p:sp>
       <p:sp>
         <p:nvSpPr>
-          <p:cNvPr id="21" name="TextBox 20"/>
+          <p:cNvPr id="23" name="TextBox 22"/>
           <p:cNvSpPr txBox="1"/>
           <p:nvPr/>
         </p:nvSpPr>
@@ -17595,7 +18123,7 @@
       </p:sp>
       <p:sp>
         <p:nvSpPr>
-          <p:cNvPr id="22" name="Rectangle 21"/>
+          <p:cNvPr id="24" name="Rectangle 23"/>
           <p:cNvSpPr/>
           <p:nvPr/>
         </p:nvSpPr>
@@ -17639,7 +18167,7 @@
       </p:sp>
       <p:sp>
         <p:nvSpPr>
-          <p:cNvPr id="23" name="Rectangle 22"/>
+          <p:cNvPr id="25" name="Rectangle 24"/>
           <p:cNvSpPr/>
           <p:nvPr/>
         </p:nvSpPr>
@@ -17685,7 +18213,7 @@
       </p:sp>
       <p:sp>
         <p:nvSpPr>
-          <p:cNvPr id="24" name="Freeform 23"/>
+          <p:cNvPr id="26" name="Freeform 25"/>
           <p:cNvSpPr/>
           <p:nvPr/>
         </p:nvSpPr>
@@ -17764,7 +18292,51 @@
       </p:sp>
       <p:sp>
         <p:nvSpPr>
-          <p:cNvPr id="25" name="TextBox 24"/>
+          <p:cNvPr id="27" name="Rectangle 26"/>
+          <p:cNvSpPr/>
+          <p:nvPr/>
+        </p:nvSpPr>
+        <p:spPr>
+          <a:xfrm>
+            <a:off x="9110777" y="3314700"/>
+            <a:ext cx="68580" cy="68580"/>
+          </a:xfrm>
+          <a:prstGeom prst="rect">
+            <a:avLst/>
+          </a:prstGeom>
+          <a:solidFill>
+            <a:srgbClr val="00FF9C"/>
+          </a:solidFill>
+          <a:ln>
+            <a:noFill/>
+          </a:ln>
+          <a:effectLst/>
+        </p:spPr>
+        <p:style>
+          <a:lnRef idx="1">
+            <a:schemeClr val="accent1"/>
+          </a:lnRef>
+          <a:fillRef idx="3">
+            <a:schemeClr val="accent1"/>
+          </a:fillRef>
+          <a:effectRef idx="2">
+            <a:schemeClr val="accent1"/>
+          </a:effectRef>
+          <a:fontRef idx="minor">
+            <a:schemeClr val="lt1"/>
+          </a:fontRef>
+        </p:style>
+        <p:txBody>
+          <a:bodyPr rtlCol="0" anchor="ctr"/>
+          <a:lstStyle/>
+          <a:p>
+            <a:pPr algn="ctr"/>
+          </a:p>
+        </p:txBody>
+      </p:sp>
+      <p:sp>
+        <p:nvSpPr>
+          <p:cNvPr id="28" name="TextBox 27"/>
           <p:cNvSpPr txBox="1"/>
           <p:nvPr/>
         </p:nvSpPr>
@@ -17803,7 +18375,7 @@
       </p:sp>
       <p:sp>
         <p:nvSpPr>
-          <p:cNvPr id="26" name="TextBox 25"/>
+          <p:cNvPr id="29" name="TextBox 28"/>
           <p:cNvSpPr txBox="1"/>
           <p:nvPr/>
         </p:nvSpPr>
@@ -17842,7 +18414,7 @@
       </p:sp>
       <p:sp>
         <p:nvSpPr>
-          <p:cNvPr id="27" name="Rectangle 26"/>
+          <p:cNvPr id="30" name="Rectangle 29"/>
           <p:cNvSpPr/>
           <p:nvPr/>
         </p:nvSpPr>
@@ -17886,7 +18458,7 @@
       </p:sp>
       <p:sp>
         <p:nvSpPr>
-          <p:cNvPr id="28" name="TextBox 27"/>
+          <p:cNvPr id="31" name="TextBox 30"/>
           <p:cNvSpPr txBox="1"/>
           <p:nvPr/>
         </p:nvSpPr>
@@ -17929,7 +18501,7 @@
       </p:sp>
       <p:sp>
         <p:nvSpPr>
-          <p:cNvPr id="29" name="TextBox 28"/>
+          <p:cNvPr id="32" name="TextBox 31"/>
           <p:cNvSpPr txBox="1"/>
           <p:nvPr/>
         </p:nvSpPr>
